--- a/outputs/presentation/uncertainty-3c-strategy-options.pptx
+++ b/outputs/presentation/uncertainty-3c-strategy-options.pptx
@@ -524,7 +524,12 @@
           </a:p>
           <a:p>
             <a:r>
-              <a:t>[시안 A 도해형] 칸마다 왼쪽 그림이 작동 원리입니다. 전략 1은 한 라인을 DRAM과 NAND가 나눠 쓰고 경계가 움직이는 그림(C1), 검증된 Cell 자산이 새 제품의 Cell 층으로 그대로 들어가는 그림(C2), 공통 Cell 아래 고객별 Peri를 붙이는 그림(C3)입니다. 전략 2는 메모리 설계 자원이 로직 IP로 바뀌는 그림, 검증 품질과 적기 공급 마일스톤, 가속기별로 Base Die 로직이 다른 HBM 그림입니다. 전략 3은 고객 변화를 먼저 감지하는 그림, NAND에서 SSD, 서버로 오르는 계단, 삼성과 고객이 함께 서버 구조를 설계하는 그림입니다.</a:t>
+              <a:t>[이미지] 전략 1은 삼성 FMS 2026 전시의 Bonding V-NAND 적층 모형 사진(Cell과 Peri를 따로 만들어 붙이는 본딩 구조), 전략 2는 3D DRAM 구조 개념 렌더(셀 층을 수평으로 쌓고 아래 Peri 다이에 붙인 구조, 실물 사진 아님)입니다.</a:t>
+            </a:r>
+          </a:p>
+          <a:p>
+            <a:r>
+              <a:t>[시안 A 도해형] 칸마다 왼쪽 그림이 작동 원리입니다. 전략 1은 한 라인을 DRAM과 NAND가 나눠 쓰고 경계가 움직이는 그림(C1), 검증된 Cell 자산이 새 제품의 Cell 층으로 그대로 들어가는 그림(C2), 공통 Cell 아래 고객별 Peri를 붙이는 그림(C3)입니다. 전략 2는 메모리 설계 자원이 로직 IP로 바뀌는 그림, 검증 품질과 적기 공급 마일스톤, 가속기별로 아래 Logic Die가 다른 메모리 적층 그림입니다. 전략 3은 고객 변화를 먼저 감지하는 그림, NAND에서 SSD, 서버로 오르는 계단, 삼성과 고객이 함께 서버 구조를 설계하는 그림입니다.</a:t>
             </a:r>
           </a:p>
         </p:txBody>
@@ -614,6 +619,11 @@
           </a:p>
           <a:p>
             <a:r>
+              <a:t>[이미지] 전략 1은 삼성 FMS 2026 전시의 Bonding V-NAND 적층 모형 사진(Cell과 Peri를 따로 만들어 붙이는 본딩 구조), 전략 2는 3D DRAM 구조 개념 렌더(셀 층을 수평으로 쌓고 아래 Peri 다이에 붙인 구조, 실물 사진 아님)입니다.</a:t>
+            </a:r>
+          </a:p>
+          <a:p>
+            <a:r>
               <a:t>[시안 B 아이콘 키워드형] 왼쪽은 이 체계가 왜 필요한지입니다. 위 그림은 개념도로, 지금 이후 수요는 예측선 하나가 아니라 넓어지는 범위 안 어디로든 갈 수 있음을 보입니다. 그래서 예측 하나에 걸지 않고 자원 · 기술 · 고객 세 꼭짓점을 하나의 체계로 묶습니다. 오른쪽 매트릭스는 세 전략이 각 C에서 무엇을 하는지 아이콘과 키워드로 보입니다.</a:t>
             </a:r>
           </a:p>
@@ -700,6 +710,11 @@
           <a:p>
             <a:r>
               <a:t>[전략 3] 고객 시스템을 고려한 스토리지 개발. C1: 고객과의 기술 협업으로 기술 변화를 빠르게 감지하고, 차세대 기술 수요를 함께 만들고 설계하는 체계를 만듭니다. C2: 고객 시스템과 워크로드 연구로 NAND 단품과 SSD 지식을 스토리지 서버 시스템 지식으로 넓힙니다. C3: 고객과 AI 수요에 맞춰 SSD와 스토리지 서버의 기능과 구조를 함께 설계합니다.</a:t>
+            </a:r>
+          </a:p>
+          <a:p>
+            <a:r>
+              <a:t>[이미지] 전략 1은 삼성 FMS 2026 전시의 Bonding V-NAND 적층 모형 사진(Cell과 Peri를 따로 만들어 붙이는 본딩 구조), 전략 2는 3D DRAM 구조 개념 렌더(셀 층을 수평으로 쌓고 아래 Peri 다이에 붙인 구조, 실물 사진 아님)입니다.</a:t>
             </a:r>
           </a:p>
           <a:p>
@@ -4706,7 +4721,7 @@
         <p:spPr>
           <a:xfrm>
             <a:off x="886968" y="3785615"/>
-            <a:ext cx="2286000" cy="1005840"/>
+            <a:ext cx="2048256" cy="1005840"/>
           </a:xfrm>
           <a:prstGeom prst="rect">
             <a:avLst/>
@@ -4773,7 +4788,7 @@
       </p:sp>
       <p:pic>
         <p:nvPicPr>
-          <p:cNvPr id="25" name="Picture 24" descr="render_dram.png"/>
+          <p:cNvPr id="25" name="Picture 24" descr="bonding.jpg"/>
           <p:cNvPicPr>
             <a:picLocks noChangeAspect="1"/>
           </p:cNvPicPr>
@@ -4787,38 +4802,58 @@
         </p:blipFill>
         <p:spPr>
           <a:xfrm>
-            <a:off x="3099816" y="3412262"/>
-            <a:ext cx="1170432" cy="439469"/>
+            <a:off x="2898648" y="3320986"/>
+            <a:ext cx="1371600" cy="1441323"/>
           </a:xfrm>
           <a:prstGeom prst="rect">
             <a:avLst/>
           </a:prstGeom>
         </p:spPr>
       </p:pic>
-      <p:pic>
-        <p:nvPicPr>
-          <p:cNvPr id="26" name="Picture 25" descr="render_nand.png"/>
-          <p:cNvPicPr>
-            <a:picLocks noChangeAspect="1"/>
-          </p:cNvPicPr>
-          <p:nvPr/>
-        </p:nvPicPr>
-        <p:blipFill>
-          <a:blip r:embed="rId6"/>
-          <a:stretch>
-            <a:fillRect/>
-          </a:stretch>
-        </p:blipFill>
-        <p:spPr>
-          <a:xfrm>
-            <a:off x="3179815" y="4027017"/>
-            <a:ext cx="1010432" cy="746150"/>
-          </a:xfrm>
-          <a:prstGeom prst="rect">
-            <a:avLst/>
-          </a:prstGeom>
-        </p:spPr>
-      </p:pic>
+      <p:sp>
+        <p:nvSpPr>
+          <p:cNvPr id="26" name="Rectangle 25"/>
+          <p:cNvSpPr/>
+          <p:nvPr/>
+        </p:nvSpPr>
+        <p:spPr>
+          <a:xfrm>
+            <a:off x="2898648" y="3320986"/>
+            <a:ext cx="1371600" cy="1441323"/>
+          </a:xfrm>
+          <a:prstGeom prst="rect">
+            <a:avLst/>
+          </a:prstGeom>
+          <a:noFill/>
+          <a:ln w="9525">
+            <a:solidFill>
+              <a:srgbClr val="D9D9D9"/>
+            </a:solidFill>
+          </a:ln>
+          <a:effectLst/>
+        </p:spPr>
+        <p:style>
+          <a:lnRef idx="1">
+            <a:schemeClr val="accent1"/>
+          </a:lnRef>
+          <a:fillRef idx="3">
+            <a:schemeClr val="accent1"/>
+          </a:fillRef>
+          <a:effectRef idx="2">
+            <a:schemeClr val="accent1"/>
+          </a:effectRef>
+          <a:fontRef idx="minor">
+            <a:schemeClr val="lt1"/>
+          </a:fontRef>
+        </p:style>
+        <p:txBody>
+          <a:bodyPr rtlCol="0" anchor="ctr"/>
+          <a:lstStyle/>
+          <a:p>
+            <a:pPr algn="ctr"/>
+          </a:p>
+        </p:txBody>
+      </p:sp>
       <p:sp>
         <p:nvSpPr>
           <p:cNvPr id="27" name="Rounded Rectangle 26"/>
@@ -4876,7 +4911,7 @@
           <p:nvPr/>
         </p:nvPicPr>
         <p:blipFill>
-          <a:blip r:embed="rId7"/>
+          <a:blip r:embed="rId6"/>
           <a:stretch>
             <a:fillRect/>
           </a:stretch>
@@ -6848,7 +6883,7 @@
         <p:spPr>
           <a:xfrm>
             <a:off x="886968" y="5632704"/>
-            <a:ext cx="2286000" cy="1005840"/>
+            <a:ext cx="2048256" cy="1005840"/>
           </a:xfrm>
           <a:prstGeom prst="rect">
             <a:avLst/>
@@ -6915,22 +6950,22 @@
       </p:sp>
       <p:pic>
         <p:nvPicPr>
-          <p:cNvPr id="71" name="Picture 70" descr="render_hbm.png"/>
+          <p:cNvPr id="71" name="Picture 70" descr="render_dram3d.png"/>
           <p:cNvPicPr>
             <a:picLocks noChangeAspect="1"/>
           </p:cNvPicPr>
           <p:nvPr/>
         </p:nvPicPr>
         <p:blipFill>
-          <a:blip r:embed="rId8"/>
+          <a:blip r:embed="rId7"/>
           <a:stretch>
             <a:fillRect/>
           </a:stretch>
         </p:blipFill>
         <p:spPr>
           <a:xfrm>
-            <a:off x="3099816" y="5460811"/>
-            <a:ext cx="1170432" cy="855849"/>
+            <a:off x="2898648" y="5390915"/>
+            <a:ext cx="1371600" cy="995641"/>
           </a:xfrm>
           <a:prstGeom prst="rect">
             <a:avLst/>
@@ -7438,7 +7473,7 @@
           <p:nvPr/>
         </p:nvPicPr>
         <p:blipFill>
-          <a:blip r:embed="rId9"/>
+          <a:blip r:embed="rId8"/>
           <a:stretch>
             <a:fillRect/>
           </a:stretch>
@@ -7506,7 +7541,7 @@
           <p:nvPr/>
         </p:nvPicPr>
         <p:blipFill>
-          <a:blip r:embed="rId10"/>
+          <a:blip r:embed="rId9"/>
           <a:stretch>
             <a:fillRect/>
           </a:stretch>
@@ -7810,7 +7845,7 @@
           <p:nvPr/>
         </p:nvPicPr>
         <p:blipFill>
-          <a:blip r:embed="rId11"/>
+          <a:blip r:embed="rId10"/>
           <a:stretch>
             <a:fillRect/>
           </a:stretch>
@@ -9087,7 +9122,7 @@
                 <a:latin typeface="Arial"/>
                 <a:ea typeface="Arial"/>
               </a:rPr>
-              <a:t>가속기별 Base Die</a:t>
+              <a:t>가속기별 Logic Die</a:t>
             </a:r>
           </a:p>
         </p:txBody>
@@ -9385,7 +9420,7 @@
         <p:spPr>
           <a:xfrm>
             <a:off x="886968" y="7479792"/>
-            <a:ext cx="2286000" cy="1005840"/>
+            <a:ext cx="2048256" cy="1005840"/>
           </a:xfrm>
           <a:prstGeom prst="rect">
             <a:avLst/>
@@ -9453,6 +9488,30 @@
       <p:pic>
         <p:nvPicPr>
           <p:cNvPr id="126" name="Picture 125" descr="render_ssd.png"/>
+          <p:cNvPicPr>
+            <a:picLocks noChangeAspect="1"/>
+          </p:cNvPicPr>
+          <p:nvPr/>
+        </p:nvPicPr>
+        <p:blipFill>
+          <a:blip r:embed="rId11"/>
+          <a:stretch>
+            <a:fillRect/>
+          </a:stretch>
+        </p:blipFill>
+        <p:spPr>
+          <a:xfrm>
+            <a:off x="2898648" y="7061307"/>
+            <a:ext cx="1371600" cy="509247"/>
+          </a:xfrm>
+          <a:prstGeom prst="rect">
+            <a:avLst/>
+          </a:prstGeom>
+        </p:spPr>
+      </p:pic>
+      <p:pic>
+        <p:nvPicPr>
+          <p:cNvPr id="127" name="Picture 126" descr="render_server.png"/>
           <p:cNvPicPr>
             <a:picLocks noChangeAspect="1"/>
           </p:cNvPicPr>
@@ -9466,32 +9525,8 @@
         </p:blipFill>
         <p:spPr>
           <a:xfrm>
-            <a:off x="3099816" y="7108893"/>
-            <a:ext cx="1170432" cy="434557"/>
-          </a:xfrm>
-          <a:prstGeom prst="rect">
-            <a:avLst/>
-          </a:prstGeom>
-        </p:spPr>
-      </p:pic>
-      <p:pic>
-        <p:nvPicPr>
-          <p:cNvPr id="127" name="Picture 126" descr="render_server.png"/>
-          <p:cNvPicPr>
-            <a:picLocks noChangeAspect="1"/>
-          </p:cNvPicPr>
-          <p:nvPr/>
-        </p:nvPicPr>
-        <p:blipFill>
-          <a:blip r:embed="rId13"/>
-          <a:stretch>
-            <a:fillRect/>
-          </a:stretch>
-        </p:blipFill>
-        <p:spPr>
-          <a:xfrm>
-            <a:off x="3099816" y="7749864"/>
-            <a:ext cx="1170432" cy="688808"/>
+            <a:off x="2933111" y="7718999"/>
+            <a:ext cx="1302672" cy="766632"/>
           </a:xfrm>
           <a:prstGeom prst="rect">
             <a:avLst/>
@@ -9729,7 +9764,7 @@
           <p:nvPr/>
         </p:nvPicPr>
         <p:blipFill>
-          <a:blip r:embed="rId14"/>
+          <a:blip r:embed="rId13"/>
           <a:stretch>
             <a:fillRect/>
           </a:stretch>
@@ -10123,7 +10158,7 @@
           <p:nvPr/>
         </p:nvPicPr>
         <p:blipFill>
-          <a:blip r:embed="rId6"/>
+          <a:blip r:embed="rId14"/>
           <a:stretch>
             <a:fillRect/>
           </a:stretch>
@@ -10231,7 +10266,7 @@
           <p:nvPr/>
         </p:nvPicPr>
         <p:blipFill>
-          <a:blip r:embed="rId12"/>
+          <a:blip r:embed="rId11"/>
           <a:stretch>
             <a:fillRect/>
           </a:stretch>
@@ -10339,7 +10374,7 @@
           <p:nvPr/>
         </p:nvPicPr>
         <p:blipFill>
-          <a:blip r:embed="rId13"/>
+          <a:blip r:embed="rId12"/>
           <a:stretch>
             <a:fillRect/>
           </a:stretch>
@@ -10745,7 +10780,7 @@
           <p:nvPr/>
         </p:nvPicPr>
         <p:blipFill>
-          <a:blip r:embed="rId13"/>
+          <a:blip r:embed="rId12"/>
           <a:stretch>
             <a:fillRect/>
           </a:stretch>
@@ -11192,7 +11227,7 @@
                 <a:latin typeface="Arial"/>
                 <a:ea typeface="Arial"/>
               </a:rPr>
-              <a:t>부품 이미지는 3D 렌더(사진 교체: assets/photos), 아이콘은 Tabler Icons(MIT).</a:t>
+              <a:t>전략 1 사진: Samsung Semiconductor FMS 2026 전시(V10 Bonding V-NAND). 3D DRAM · SSD · 서버는 3D 렌더(개념), 아이콘 Tabler Icons(MIT).</a:t>
             </a:r>
           </a:p>
         </p:txBody>
@@ -13367,53 +13402,9 @@
           </a:p>
         </p:txBody>
       </p:sp>
-      <p:sp>
-        <p:nvSpPr>
-          <p:cNvPr id="50" name="Oval 49"/>
-          <p:cNvSpPr/>
-          <p:nvPr/>
-        </p:nvSpPr>
-        <p:spPr>
-          <a:xfrm>
-            <a:off x="5239512" y="4023360"/>
-            <a:ext cx="658368" cy="658368"/>
-          </a:xfrm>
-          <a:prstGeom prst="ellipse">
-            <a:avLst/>
-          </a:prstGeom>
-          <a:solidFill>
-            <a:srgbClr val="3C4FA5"/>
-          </a:solidFill>
-          <a:ln>
-            <a:noFill/>
-          </a:ln>
-          <a:effectLst/>
-        </p:spPr>
-        <p:style>
-          <a:lnRef idx="1">
-            <a:schemeClr val="accent1"/>
-          </a:lnRef>
-          <a:fillRef idx="3">
-            <a:schemeClr val="accent1"/>
-          </a:fillRef>
-          <a:effectRef idx="2">
-            <a:schemeClr val="accent1"/>
-          </a:effectRef>
-          <a:fontRef idx="minor">
-            <a:schemeClr val="lt1"/>
-          </a:fontRef>
-        </p:style>
-        <p:txBody>
-          <a:bodyPr rtlCol="0" anchor="ctr"/>
-          <a:lstStyle/>
-          <a:p>
-            <a:pPr algn="ctr"/>
-          </a:p>
-        </p:txBody>
-      </p:sp>
       <p:pic>
         <p:nvPicPr>
-          <p:cNvPr id="51" name="Picture 50" descr="layers-linked_white.png"/>
+          <p:cNvPr id="50" name="Picture 49" descr="bonding.jpg"/>
           <p:cNvPicPr>
             <a:picLocks noChangeAspect="1"/>
           </p:cNvPicPr>
@@ -13427,14 +13418,58 @@
         </p:blipFill>
         <p:spPr>
           <a:xfrm>
-            <a:off x="5384352" y="4168200"/>
-            <a:ext cx="368686" cy="368686"/>
+            <a:off x="5202936" y="3814450"/>
+            <a:ext cx="1024128" cy="1076187"/>
           </a:xfrm>
           <a:prstGeom prst="rect">
             <a:avLst/>
           </a:prstGeom>
         </p:spPr>
       </p:pic>
+      <p:sp>
+        <p:nvSpPr>
+          <p:cNvPr id="51" name="Rectangle 50"/>
+          <p:cNvSpPr/>
+          <p:nvPr/>
+        </p:nvSpPr>
+        <p:spPr>
+          <a:xfrm>
+            <a:off x="5202936" y="3814450"/>
+            <a:ext cx="1024128" cy="1076187"/>
+          </a:xfrm>
+          <a:prstGeom prst="rect">
+            <a:avLst/>
+          </a:prstGeom>
+          <a:noFill/>
+          <a:ln w="9525">
+            <a:solidFill>
+              <a:srgbClr val="D9D9D9"/>
+            </a:solidFill>
+          </a:ln>
+          <a:effectLst/>
+        </p:spPr>
+        <p:style>
+          <a:lnRef idx="1">
+            <a:schemeClr val="accent1"/>
+          </a:lnRef>
+          <a:fillRef idx="3">
+            <a:schemeClr val="accent1"/>
+          </a:fillRef>
+          <a:effectRef idx="2">
+            <a:schemeClr val="accent1"/>
+          </a:effectRef>
+          <a:fontRef idx="minor">
+            <a:schemeClr val="lt1"/>
+          </a:fontRef>
+        </p:style>
+        <p:txBody>
+          <a:bodyPr rtlCol="0" anchor="ctr"/>
+          <a:lstStyle/>
+          <a:p>
+            <a:pPr algn="ctr"/>
+          </a:p>
+        </p:txBody>
+      </p:sp>
       <p:sp>
         <p:nvSpPr>
           <p:cNvPr id="52" name="TextBox 51"/>
@@ -13443,8 +13478,8 @@
         </p:nvSpPr>
         <p:spPr>
           <a:xfrm>
-            <a:off x="6044184" y="3621024"/>
-            <a:ext cx="1975103" cy="1463040"/>
+            <a:off x="6318504" y="3621024"/>
+            <a:ext cx="1719072" cy="1463040"/>
           </a:xfrm>
           <a:prstGeom prst="rect">
             <a:avLst/>
@@ -13480,7 +13515,7 @@
               </a:lnSpc>
             </a:pPr>
             <a:r>
-              <a:rPr sz="2000" b="1">
+              <a:rPr sz="1800" b="1">
                 <a:solidFill>
                   <a:srgbClr val="1A1A1A"/>
                 </a:solidFill>
@@ -13497,7 +13532,7 @@
               </a:lnSpc>
             </a:pPr>
             <a:r>
-              <a:rPr sz="2000" b="1">
+              <a:rPr sz="1800" b="1">
                 <a:solidFill>
                   <a:srgbClr val="1A1A1A"/>
                 </a:solidFill>
@@ -13514,7 +13549,7 @@
               </a:lnSpc>
             </a:pPr>
             <a:r>
-              <a:rPr sz="2000" b="1">
+              <a:rPr sz="1800" b="1">
                 <a:solidFill>
                   <a:srgbClr val="1A1A1A"/>
                 </a:solidFill>
@@ -14245,53 +14280,9 @@
           </a:p>
         </p:txBody>
       </p:sp>
-      <p:sp>
-        <p:nvSpPr>
-          <p:cNvPr id="69" name="Oval 68"/>
-          <p:cNvSpPr/>
-          <p:nvPr/>
-        </p:nvSpPr>
-        <p:spPr>
-          <a:xfrm>
-            <a:off x="5239512" y="5742431"/>
-            <a:ext cx="658368" cy="658368"/>
-          </a:xfrm>
-          <a:prstGeom prst="ellipse">
-            <a:avLst/>
-          </a:prstGeom>
-          <a:solidFill>
-            <a:srgbClr val="3C4FA5"/>
-          </a:solidFill>
-          <a:ln>
-            <a:noFill/>
-          </a:ln>
-          <a:effectLst/>
-        </p:spPr>
-        <p:style>
-          <a:lnRef idx="1">
-            <a:schemeClr val="accent1"/>
-          </a:lnRef>
-          <a:fillRef idx="3">
-            <a:schemeClr val="accent1"/>
-          </a:fillRef>
-          <a:effectRef idx="2">
-            <a:schemeClr val="accent1"/>
-          </a:effectRef>
-          <a:fontRef idx="minor">
-            <a:schemeClr val="lt1"/>
-          </a:fontRef>
-        </p:style>
-        <p:txBody>
-          <a:bodyPr rtlCol="0" anchor="ctr"/>
-          <a:lstStyle/>
-          <a:p>
-            <a:pPr algn="ctr"/>
-          </a:p>
-        </p:txBody>
-      </p:sp>
       <p:pic>
         <p:nvPicPr>
-          <p:cNvPr id="70" name="Picture 69" descr="stack-2_white.png"/>
+          <p:cNvPr id="69" name="Picture 68" descr="render_dram3d.png"/>
           <p:cNvPicPr>
             <a:picLocks noChangeAspect="1"/>
           </p:cNvPicPr>
@@ -14305,8 +14296,8 @@
         </p:blipFill>
         <p:spPr>
           <a:xfrm>
-            <a:off x="5384352" y="5887272"/>
-            <a:ext cx="368686" cy="368686"/>
+            <a:off x="5202936" y="5699909"/>
+            <a:ext cx="1024128" cy="743412"/>
           </a:xfrm>
           <a:prstGeom prst="rect">
             <a:avLst/>
@@ -14315,14 +14306,14 @@
       </p:pic>
       <p:sp>
         <p:nvSpPr>
-          <p:cNvPr id="71" name="TextBox 70"/>
+          <p:cNvPr id="70" name="TextBox 69"/>
           <p:cNvSpPr txBox="1"/>
           <p:nvPr/>
         </p:nvSpPr>
         <p:spPr>
           <a:xfrm>
-            <a:off x="6044184" y="5340096"/>
-            <a:ext cx="1975103" cy="1463040"/>
+            <a:off x="6318504" y="5340096"/>
+            <a:ext cx="1719072" cy="1463040"/>
           </a:xfrm>
           <a:prstGeom prst="rect">
             <a:avLst/>
@@ -14358,7 +14349,7 @@
               </a:lnSpc>
             </a:pPr>
             <a:r>
-              <a:rPr sz="2000" b="1">
+              <a:rPr sz="1800" b="1">
                 <a:solidFill>
                   <a:srgbClr val="1A1A1A"/>
                 </a:solidFill>
@@ -14375,7 +14366,7 @@
               </a:lnSpc>
             </a:pPr>
             <a:r>
-              <a:rPr sz="2000" b="1">
+              <a:rPr sz="1800" b="1">
                 <a:solidFill>
                   <a:srgbClr val="1A1A1A"/>
                 </a:solidFill>
@@ -14392,7 +14383,7 @@
               </a:lnSpc>
             </a:pPr>
             <a:r>
-              <a:rPr sz="2000" b="1">
+              <a:rPr sz="1800" b="1">
                 <a:solidFill>
                   <a:srgbClr val="1A1A1A"/>
                 </a:solidFill>
@@ -14406,7 +14397,7 @@
       </p:sp>
       <p:sp>
         <p:nvSpPr>
-          <p:cNvPr id="72" name="Rounded Rectangle 71"/>
+          <p:cNvPr id="71" name="Rounded Rectangle 70"/>
           <p:cNvSpPr/>
           <p:nvPr/>
         </p:nvSpPr>
@@ -14454,7 +14445,7 @@
       </p:sp>
       <p:sp>
         <p:nvSpPr>
-          <p:cNvPr id="73" name="Oval 72"/>
+          <p:cNvPr id="72" name="Oval 71"/>
           <p:cNvSpPr/>
           <p:nvPr/>
         </p:nvSpPr>
@@ -14498,7 +14489,7 @@
       </p:sp>
       <p:pic>
         <p:nvPicPr>
-          <p:cNvPr id="74" name="Picture 73" descr="cpu-2_blue.png"/>
+          <p:cNvPr id="73" name="Picture 72" descr="cpu-2_blue.png"/>
           <p:cNvPicPr>
             <a:picLocks noChangeAspect="1"/>
           </p:cNvPicPr>
@@ -14522,7 +14513,7 @@
       </p:pic>
       <p:sp>
         <p:nvSpPr>
-          <p:cNvPr id="75" name="TextBox 74"/>
+          <p:cNvPr id="74" name="TextBox 73"/>
           <p:cNvSpPr txBox="1"/>
           <p:nvPr/>
         </p:nvSpPr>
@@ -14579,7 +14570,7 @@
       </p:sp>
       <p:sp>
         <p:nvSpPr>
-          <p:cNvPr id="76" name="TextBox 75"/>
+          <p:cNvPr id="75" name="TextBox 74"/>
           <p:cNvSpPr txBox="1"/>
           <p:nvPr/>
         </p:nvSpPr>
@@ -14636,7 +14627,7 @@
       </p:sp>
       <p:sp>
         <p:nvSpPr>
-          <p:cNvPr id="77" name="Rounded Rectangle 76"/>
+          <p:cNvPr id="76" name="Rounded Rectangle 75"/>
           <p:cNvSpPr/>
           <p:nvPr/>
         </p:nvSpPr>
@@ -14684,7 +14675,7 @@
       </p:sp>
       <p:sp>
         <p:nvSpPr>
-          <p:cNvPr id="78" name="Oval 77"/>
+          <p:cNvPr id="77" name="Oval 76"/>
           <p:cNvSpPr/>
           <p:nvPr/>
         </p:nvSpPr>
@@ -14728,7 +14719,7 @@
       </p:sp>
       <p:pic>
         <p:nvPicPr>
-          <p:cNvPr id="79" name="Picture 78" descr="shield-check_blue.png"/>
+          <p:cNvPr id="78" name="Picture 77" descr="shield-check_blue.png"/>
           <p:cNvPicPr>
             <a:picLocks noChangeAspect="1"/>
           </p:cNvPicPr>
@@ -14752,7 +14743,7 @@
       </p:pic>
       <p:sp>
         <p:nvSpPr>
-          <p:cNvPr id="80" name="TextBox 79"/>
+          <p:cNvPr id="79" name="TextBox 78"/>
           <p:cNvSpPr txBox="1"/>
           <p:nvPr/>
         </p:nvSpPr>
@@ -14809,7 +14800,7 @@
       </p:sp>
       <p:sp>
         <p:nvSpPr>
-          <p:cNvPr id="81" name="TextBox 80"/>
+          <p:cNvPr id="80" name="TextBox 79"/>
           <p:cNvSpPr txBox="1"/>
           <p:nvPr/>
         </p:nvSpPr>
@@ -14866,7 +14857,7 @@
       </p:sp>
       <p:sp>
         <p:nvSpPr>
-          <p:cNvPr id="82" name="Rounded Rectangle 81"/>
+          <p:cNvPr id="81" name="Rounded Rectangle 80"/>
           <p:cNvSpPr/>
           <p:nvPr/>
         </p:nvSpPr>
@@ -14914,7 +14905,7 @@
       </p:sp>
       <p:sp>
         <p:nvSpPr>
-          <p:cNvPr id="83" name="Oval 82"/>
+          <p:cNvPr id="82" name="Oval 81"/>
           <p:cNvSpPr/>
           <p:nvPr/>
         </p:nvSpPr>
@@ -14958,7 +14949,7 @@
       </p:sp>
       <p:pic>
         <p:nvPicPr>
-          <p:cNvPr id="84" name="Picture 83" descr="puzzle_blue.png"/>
+          <p:cNvPr id="83" name="Picture 82" descr="puzzle_blue.png"/>
           <p:cNvPicPr>
             <a:picLocks noChangeAspect="1"/>
           </p:cNvPicPr>
@@ -14982,7 +14973,7 @@
       </p:pic>
       <p:sp>
         <p:nvSpPr>
-          <p:cNvPr id="85" name="TextBox 84"/>
+          <p:cNvPr id="84" name="TextBox 83"/>
           <p:cNvSpPr txBox="1"/>
           <p:nvPr/>
         </p:nvSpPr>
@@ -15039,7 +15030,7 @@
       </p:sp>
       <p:sp>
         <p:nvSpPr>
-          <p:cNvPr id="86" name="TextBox 85"/>
+          <p:cNvPr id="85" name="TextBox 84"/>
           <p:cNvSpPr txBox="1"/>
           <p:nvPr/>
         </p:nvSpPr>
@@ -15096,7 +15087,7 @@
       </p:sp>
       <p:sp>
         <p:nvSpPr>
-          <p:cNvPr id="87" name="Rounded Rectangle 86"/>
+          <p:cNvPr id="86" name="Rounded Rectangle 85"/>
           <p:cNvSpPr/>
           <p:nvPr/>
         </p:nvSpPr>
@@ -15140,53 +15131,9 @@
           </a:p>
         </p:txBody>
       </p:sp>
-      <p:sp>
-        <p:nvSpPr>
-          <p:cNvPr id="88" name="Oval 87"/>
-          <p:cNvSpPr/>
-          <p:nvPr/>
-        </p:nvSpPr>
-        <p:spPr>
-          <a:xfrm>
-            <a:off x="5239512" y="7461504"/>
-            <a:ext cx="658368" cy="658368"/>
-          </a:xfrm>
-          <a:prstGeom prst="ellipse">
-            <a:avLst/>
-          </a:prstGeom>
-          <a:solidFill>
-            <a:srgbClr val="3C4FA5"/>
-          </a:solidFill>
-          <a:ln>
-            <a:noFill/>
-          </a:ln>
-          <a:effectLst/>
-        </p:spPr>
-        <p:style>
-          <a:lnRef idx="1">
-            <a:schemeClr val="accent1"/>
-          </a:lnRef>
-          <a:fillRef idx="3">
-            <a:schemeClr val="accent1"/>
-          </a:fillRef>
-          <a:effectRef idx="2">
-            <a:schemeClr val="accent1"/>
-          </a:effectRef>
-          <a:fontRef idx="minor">
-            <a:schemeClr val="lt1"/>
-          </a:fontRef>
-        </p:style>
-        <p:txBody>
-          <a:bodyPr rtlCol="0" anchor="ctr"/>
-          <a:lstStyle/>
-          <a:p>
-            <a:pPr algn="ctr"/>
-          </a:p>
-        </p:txBody>
-      </p:sp>
       <p:pic>
         <p:nvPicPr>
-          <p:cNvPr id="89" name="Picture 88" descr="server_white.png"/>
+          <p:cNvPr id="87" name="Picture 86" descr="render_ssd.png"/>
           <p:cNvPicPr>
             <a:picLocks noChangeAspect="1"/>
           </p:cNvPicPr>
@@ -15200,24 +15147,48 @@
         </p:blipFill>
         <p:spPr>
           <a:xfrm>
-            <a:off x="5384352" y="7606344"/>
-            <a:ext cx="368686" cy="368686"/>
+            <a:off x="5202936" y="7221641"/>
+            <a:ext cx="1024128" cy="380238"/>
           </a:xfrm>
           <a:prstGeom prst="rect">
             <a:avLst/>
           </a:prstGeom>
         </p:spPr>
       </p:pic>
-      <p:sp>
-        <p:nvSpPr>
-          <p:cNvPr id="90" name="TextBox 89"/>
+      <p:pic>
+        <p:nvPicPr>
+          <p:cNvPr id="88" name="Picture 87" descr="render_server.png"/>
+          <p:cNvPicPr>
+            <a:picLocks noChangeAspect="1"/>
+          </p:cNvPicPr>
+          <p:nvPr/>
+        </p:nvPicPr>
+        <p:blipFill>
+          <a:blip r:embed="rId14"/>
+          <a:stretch>
+            <a:fillRect/>
+          </a:stretch>
+        </p:blipFill>
+        <p:spPr>
+          <a:xfrm>
+            <a:off x="5202936" y="7823638"/>
+            <a:ext cx="1024128" cy="602707"/>
+          </a:xfrm>
+          <a:prstGeom prst="rect">
+            <a:avLst/>
+          </a:prstGeom>
+        </p:spPr>
+      </p:pic>
+      <p:sp>
+        <p:nvSpPr>
+          <p:cNvPr id="89" name="TextBox 88"/>
           <p:cNvSpPr txBox="1"/>
           <p:nvPr/>
         </p:nvSpPr>
         <p:spPr>
           <a:xfrm>
-            <a:off x="6044184" y="7059168"/>
-            <a:ext cx="1975103" cy="1463040"/>
+            <a:off x="6318504" y="7059168"/>
+            <a:ext cx="1719072" cy="1463040"/>
           </a:xfrm>
           <a:prstGeom prst="rect">
             <a:avLst/>
@@ -15253,7 +15224,7 @@
               </a:lnSpc>
             </a:pPr>
             <a:r>
-              <a:rPr sz="2000" b="1">
+              <a:rPr sz="1800" b="1">
                 <a:solidFill>
                   <a:srgbClr val="1A1A1A"/>
                 </a:solidFill>
@@ -15270,7 +15241,7 @@
               </a:lnSpc>
             </a:pPr>
             <a:r>
-              <a:rPr sz="2000" b="1">
+              <a:rPr sz="1800" b="1">
                 <a:solidFill>
                   <a:srgbClr val="1A1A1A"/>
                 </a:solidFill>
@@ -15287,7 +15258,7 @@
               </a:lnSpc>
             </a:pPr>
             <a:r>
-              <a:rPr sz="2000" b="1">
+              <a:rPr sz="1800" b="1">
                 <a:solidFill>
                   <a:srgbClr val="1A1A1A"/>
                 </a:solidFill>
@@ -15301,7 +15272,7 @@
       </p:sp>
       <p:sp>
         <p:nvSpPr>
-          <p:cNvPr id="91" name="Rounded Rectangle 90"/>
+          <p:cNvPr id="90" name="Rounded Rectangle 89"/>
           <p:cNvSpPr/>
           <p:nvPr/>
         </p:nvSpPr>
@@ -15349,7 +15320,7 @@
       </p:sp>
       <p:sp>
         <p:nvSpPr>
-          <p:cNvPr id="92" name="Oval 91"/>
+          <p:cNvPr id="91" name="Oval 90"/>
           <p:cNvSpPr/>
           <p:nvPr/>
         </p:nvSpPr>
@@ -15393,14 +15364,14 @@
       </p:sp>
       <p:pic>
         <p:nvPicPr>
-          <p:cNvPr id="93" name="Picture 92" descr="radar_blue.png"/>
+          <p:cNvPr id="92" name="Picture 91" descr="radar_blue.png"/>
           <p:cNvPicPr>
             <a:picLocks noChangeAspect="1"/>
           </p:cNvPicPr>
           <p:nvPr/>
         </p:nvPicPr>
         <p:blipFill>
-          <a:blip r:embed="rId14"/>
+          <a:blip r:embed="rId15"/>
           <a:stretch>
             <a:fillRect/>
           </a:stretch>
@@ -15417,7 +15388,7 @@
       </p:pic>
       <p:sp>
         <p:nvSpPr>
-          <p:cNvPr id="94" name="TextBox 93"/>
+          <p:cNvPr id="93" name="TextBox 92"/>
           <p:cNvSpPr txBox="1"/>
           <p:nvPr/>
         </p:nvSpPr>
@@ -15474,7 +15445,7 @@
       </p:sp>
       <p:sp>
         <p:nvSpPr>
-          <p:cNvPr id="95" name="TextBox 94"/>
+          <p:cNvPr id="94" name="TextBox 93"/>
           <p:cNvSpPr txBox="1"/>
           <p:nvPr/>
         </p:nvSpPr>
@@ -15531,7 +15502,7 @@
       </p:sp>
       <p:sp>
         <p:nvSpPr>
-          <p:cNvPr id="96" name="Rounded Rectangle 95"/>
+          <p:cNvPr id="95" name="Rounded Rectangle 94"/>
           <p:cNvSpPr/>
           <p:nvPr/>
         </p:nvSpPr>
@@ -15579,7 +15550,7 @@
       </p:sp>
       <p:sp>
         <p:nvSpPr>
-          <p:cNvPr id="97" name="Oval 96"/>
+          <p:cNvPr id="96" name="Oval 95"/>
           <p:cNvSpPr/>
           <p:nvPr/>
         </p:nvSpPr>
@@ -15623,14 +15594,14 @@
       </p:sp>
       <p:pic>
         <p:nvPicPr>
-          <p:cNvPr id="98" name="Picture 97" descr="sitemap_blue.png"/>
+          <p:cNvPr id="97" name="Picture 96" descr="sitemap_blue.png"/>
           <p:cNvPicPr>
             <a:picLocks noChangeAspect="1"/>
           </p:cNvPicPr>
           <p:nvPr/>
         </p:nvPicPr>
         <p:blipFill>
-          <a:blip r:embed="rId15"/>
+          <a:blip r:embed="rId16"/>
           <a:stretch>
             <a:fillRect/>
           </a:stretch>
@@ -15647,7 +15618,7 @@
       </p:pic>
       <p:sp>
         <p:nvSpPr>
-          <p:cNvPr id="99" name="TextBox 98"/>
+          <p:cNvPr id="98" name="TextBox 97"/>
           <p:cNvSpPr txBox="1"/>
           <p:nvPr/>
         </p:nvSpPr>
@@ -15704,7 +15675,7 @@
       </p:sp>
       <p:sp>
         <p:nvSpPr>
-          <p:cNvPr id="100" name="TextBox 99"/>
+          <p:cNvPr id="99" name="TextBox 98"/>
           <p:cNvSpPr txBox="1"/>
           <p:nvPr/>
         </p:nvSpPr>
@@ -15761,7 +15732,7 @@
       </p:sp>
       <p:sp>
         <p:nvSpPr>
-          <p:cNvPr id="101" name="Rounded Rectangle 100"/>
+          <p:cNvPr id="100" name="Rounded Rectangle 99"/>
           <p:cNvSpPr/>
           <p:nvPr/>
         </p:nvSpPr>
@@ -15809,7 +15780,7 @@
       </p:sp>
       <p:sp>
         <p:nvSpPr>
-          <p:cNvPr id="102" name="Oval 101"/>
+          <p:cNvPr id="101" name="Oval 100"/>
           <p:cNvSpPr/>
           <p:nvPr/>
         </p:nvSpPr>
@@ -15853,14 +15824,14 @@
       </p:sp>
       <p:pic>
         <p:nvPicPr>
-          <p:cNvPr id="103" name="Picture 102" descr="pencil-cog_blue.png"/>
+          <p:cNvPr id="102" name="Picture 101" descr="pencil-cog_blue.png"/>
           <p:cNvPicPr>
             <a:picLocks noChangeAspect="1"/>
           </p:cNvPicPr>
           <p:nvPr/>
         </p:nvPicPr>
         <p:blipFill>
-          <a:blip r:embed="rId16"/>
+          <a:blip r:embed="rId17"/>
           <a:stretch>
             <a:fillRect/>
           </a:stretch>
@@ -15877,7 +15848,7 @@
       </p:pic>
       <p:sp>
         <p:nvSpPr>
-          <p:cNvPr id="104" name="TextBox 103"/>
+          <p:cNvPr id="103" name="TextBox 102"/>
           <p:cNvSpPr txBox="1"/>
           <p:nvPr/>
         </p:nvSpPr>
@@ -15934,7 +15905,7 @@
       </p:sp>
       <p:sp>
         <p:nvSpPr>
-          <p:cNvPr id="105" name="TextBox 104"/>
+          <p:cNvPr id="104" name="TextBox 103"/>
           <p:cNvSpPr txBox="1"/>
           <p:nvPr/>
         </p:nvSpPr>
@@ -15991,7 +15962,7 @@
       </p:sp>
       <p:sp>
         <p:nvSpPr>
-          <p:cNvPr id="106" name="Rectangle 105"/>
+          <p:cNvPr id="105" name="Rectangle 104"/>
           <p:cNvSpPr/>
           <p:nvPr/>
         </p:nvSpPr>
@@ -16035,7 +16006,7 @@
       </p:sp>
       <p:sp>
         <p:nvSpPr>
-          <p:cNvPr id="107" name="TextBox 106"/>
+          <p:cNvPr id="106" name="TextBox 105"/>
           <p:cNvSpPr txBox="1"/>
           <p:nvPr/>
         </p:nvSpPr>
@@ -16075,7 +16046,7 @@
       </p:sp>
       <p:sp>
         <p:nvSpPr>
-          <p:cNvPr id="108" name="TextBox 107"/>
+          <p:cNvPr id="107" name="TextBox 106"/>
           <p:cNvSpPr txBox="1"/>
           <p:nvPr/>
         </p:nvSpPr>
@@ -16115,7 +16086,7 @@
       </p:sp>
       <p:sp>
         <p:nvSpPr>
-          <p:cNvPr id="109" name="TextBox 108"/>
+          <p:cNvPr id="108" name="TextBox 107"/>
           <p:cNvSpPr txBox="1"/>
           <p:nvPr/>
         </p:nvSpPr>
@@ -16165,14 +16136,14 @@
                 <a:latin typeface="Arial"/>
                 <a:ea typeface="Arial"/>
               </a:rPr>
-              <a:t>부품 이미지는 3D 렌더(사진 교체: assets/photos), 아이콘은 Tabler Icons(MIT).</a:t>
-            </a:r>
-          </a:p>
-        </p:txBody>
-      </p:sp>
-      <p:sp>
-        <p:nvSpPr>
-          <p:cNvPr id="110" name="TextBox 109"/>
+              <a:t>전략 1 사진: Samsung Semiconductor FMS 2026 전시(V10 Bonding V-NAND). 3D DRAM · SSD · 서버는 3D 렌더(개념), 아이콘 Tabler Icons(MIT).</a:t>
+            </a:r>
+          </a:p>
+        </p:txBody>
+      </p:sp>
+      <p:sp>
+        <p:nvSpPr>
+          <p:cNvPr id="109" name="TextBox 108"/>
           <p:cNvSpPr txBox="1"/>
           <p:nvPr/>
         </p:nvSpPr>
@@ -17487,7 +17458,7 @@
       </p:sp>
       <p:pic>
         <p:nvPicPr>
-          <p:cNvPr id="31" name="Picture 30" descr="render_dram.png"/>
+          <p:cNvPr id="31" name="Picture 30" descr="bonding.jpg"/>
           <p:cNvPicPr>
             <a:picLocks noChangeAspect="1"/>
           </p:cNvPicPr>
@@ -17501,38 +17472,58 @@
         </p:blipFill>
         <p:spPr>
           <a:xfrm>
-            <a:off x="832104" y="4114166"/>
-            <a:ext cx="932688" cy="350201"/>
+            <a:off x="832104" y="4091094"/>
+            <a:ext cx="932688" cy="980099"/>
           </a:xfrm>
           <a:prstGeom prst="rect">
             <a:avLst/>
           </a:prstGeom>
         </p:spPr>
       </p:pic>
-      <p:pic>
-        <p:nvPicPr>
-          <p:cNvPr id="32" name="Picture 31" descr="render_nand.png"/>
-          <p:cNvPicPr>
-            <a:picLocks noChangeAspect="1"/>
-          </p:cNvPicPr>
-          <p:nvPr/>
-        </p:nvPicPr>
-        <p:blipFill>
-          <a:blip r:embed="rId6"/>
-          <a:stretch>
-            <a:fillRect/>
-          </a:stretch>
-        </p:blipFill>
-        <p:spPr>
-          <a:xfrm>
-            <a:off x="952721" y="4591751"/>
-            <a:ext cx="691452" cy="510600"/>
-          </a:xfrm>
-          <a:prstGeom prst="rect">
-            <a:avLst/>
-          </a:prstGeom>
-        </p:spPr>
-      </p:pic>
+      <p:sp>
+        <p:nvSpPr>
+          <p:cNvPr id="32" name="Rectangle 31"/>
+          <p:cNvSpPr/>
+          <p:nvPr/>
+        </p:nvSpPr>
+        <p:spPr>
+          <a:xfrm>
+            <a:off x="832104" y="4091094"/>
+            <a:ext cx="932688" cy="980099"/>
+          </a:xfrm>
+          <a:prstGeom prst="rect">
+            <a:avLst/>
+          </a:prstGeom>
+          <a:noFill/>
+          <a:ln w="9525">
+            <a:solidFill>
+              <a:srgbClr val="D9D9D9"/>
+            </a:solidFill>
+          </a:ln>
+          <a:effectLst/>
+        </p:spPr>
+        <p:style>
+          <a:lnRef idx="1">
+            <a:schemeClr val="accent1"/>
+          </a:lnRef>
+          <a:fillRef idx="3">
+            <a:schemeClr val="accent1"/>
+          </a:fillRef>
+          <a:effectRef idx="2">
+            <a:schemeClr val="accent1"/>
+          </a:effectRef>
+          <a:fontRef idx="minor">
+            <a:schemeClr val="lt1"/>
+          </a:fontRef>
+        </p:style>
+        <p:txBody>
+          <a:bodyPr rtlCol="0" anchor="ctr"/>
+          <a:lstStyle/>
+          <a:p>
+            <a:pPr algn="ctr"/>
+          </a:p>
+        </p:txBody>
+      </p:sp>
       <p:sp>
         <p:nvSpPr>
           <p:cNvPr id="33" name="TextBox 32"/>
@@ -17681,7 +17672,7 @@
           <p:nvPr/>
         </p:nvPicPr>
         <p:blipFill>
-          <a:blip r:embed="rId7"/>
+          <a:blip r:embed="rId6"/>
           <a:stretch>
             <a:fillRect/>
           </a:stretch>
@@ -17850,7 +17841,7 @@
           <p:nvPr/>
         </p:nvPicPr>
         <p:blipFill>
-          <a:blip r:embed="rId8"/>
+          <a:blip r:embed="rId7"/>
           <a:stretch>
             <a:fillRect/>
           </a:stretch>
@@ -18019,7 +18010,7 @@
           <p:nvPr/>
         </p:nvPicPr>
         <p:blipFill>
-          <a:blip r:embed="rId9"/>
+          <a:blip r:embed="rId8"/>
           <a:stretch>
             <a:fillRect/>
           </a:stretch>
@@ -18225,22 +18216,22 @@
       </p:sp>
       <p:pic>
         <p:nvPicPr>
-          <p:cNvPr id="48" name="Picture 47" descr="render_hbm.png"/>
+          <p:cNvPr id="48" name="Picture 47" descr="render_dram3d.png"/>
           <p:cNvPicPr>
             <a:picLocks noChangeAspect="1"/>
           </p:cNvPicPr>
           <p:nvPr/>
         </p:nvPicPr>
         <p:blipFill>
-          <a:blip r:embed="rId10"/>
+          <a:blip r:embed="rId9"/>
           <a:stretch>
             <a:fillRect/>
           </a:stretch>
         </p:blipFill>
         <p:spPr>
           <a:xfrm>
-            <a:off x="832104" y="5593453"/>
-            <a:ext cx="932688" cy="682005"/>
+            <a:off x="832104" y="5595937"/>
+            <a:ext cx="932688" cy="677036"/>
           </a:xfrm>
           <a:prstGeom prst="rect">
             <a:avLst/>
@@ -18395,7 +18386,7 @@
           <p:nvPr/>
         </p:nvPicPr>
         <p:blipFill>
-          <a:blip r:embed="rId11"/>
+          <a:blip r:embed="rId10"/>
           <a:stretch>
             <a:fillRect/>
           </a:stretch>
@@ -18564,7 +18555,7 @@
           <p:nvPr/>
         </p:nvPicPr>
         <p:blipFill>
-          <a:blip r:embed="rId12"/>
+          <a:blip r:embed="rId11"/>
           <a:stretch>
             <a:fillRect/>
           </a:stretch>
@@ -18733,7 +18724,7 @@
           <p:nvPr/>
         </p:nvPicPr>
         <p:blipFill>
-          <a:blip r:embed="rId13"/>
+          <a:blip r:embed="rId12"/>
           <a:stretch>
             <a:fillRect/>
           </a:stretch>
@@ -18946,7 +18937,7 @@
           <p:nvPr/>
         </p:nvPicPr>
         <p:blipFill>
-          <a:blip r:embed="rId14"/>
+          <a:blip r:embed="rId13"/>
           <a:stretch>
             <a:fillRect/>
           </a:stretch>
@@ -18970,7 +18961,7 @@
           <p:nvPr/>
         </p:nvPicPr>
         <p:blipFill>
-          <a:blip r:embed="rId15"/>
+          <a:blip r:embed="rId14"/>
           <a:stretch>
             <a:fillRect/>
           </a:stretch>
@@ -19133,7 +19124,7 @@
           <p:nvPr/>
         </p:nvPicPr>
         <p:blipFill>
-          <a:blip r:embed="rId16"/>
+          <a:blip r:embed="rId15"/>
           <a:stretch>
             <a:fillRect/>
           </a:stretch>
@@ -19302,7 +19293,7 @@
           <p:nvPr/>
         </p:nvPicPr>
         <p:blipFill>
-          <a:blip r:embed="rId17"/>
+          <a:blip r:embed="rId16"/>
           <a:stretch>
             <a:fillRect/>
           </a:stretch>
@@ -19471,7 +19462,7 @@
           <p:nvPr/>
         </p:nvPicPr>
         <p:blipFill>
-          <a:blip r:embed="rId18"/>
+          <a:blip r:embed="rId17"/>
           <a:stretch>
             <a:fillRect/>
           </a:stretch>
@@ -19899,7 +19890,7 @@
                 <a:latin typeface="Arial"/>
                 <a:ea typeface="Arial"/>
               </a:rPr>
-              <a:t>부품 이미지는 3D 렌더(사진 교체: assets/photos), 아이콘은 Tabler Icons(MIT).</a:t>
+              <a:t>전략 1 사진: Samsung Semiconductor FMS 2026 전시(V10 Bonding V-NAND). 3D DRAM · SSD · 서버는 3D 렌더(개념), 아이콘 Tabler Icons(MIT).</a:t>
             </a:r>
           </a:p>
         </p:txBody>

--- a/outputs/presentation/uncertainty-3c-strategy-options.pptx
+++ b/outputs/presentation/uncertainty-3c-strategy-options.pptx
@@ -524,7 +524,7 @@
           </a:p>
           <a:p>
             <a:r>
-              <a:t>[이미지] 전략 1은 삼성 FMS 2026 전시의 Bonding V-NAND 적층 모형 사진(Cell과 Peri를 따로 만들어 붙이는 본딩 구조), 전략 2는 3D DRAM 구조 개념 렌더(셀 층을 수평으로 쌓고 아래 Peri 다이에 붙인 구조, 실물 사진 아님)입니다.</a:t>
+              <a:t>[이미지] 전략 1은 웨이퍼 간 Cu/SiO2 하이브리드 본딩의 단면 SEM 사진입니다. 위아래 웨이퍼의 Cu 패드가 맞붙은 가로 선이 본딩 계면이고, NAND의 CMOS 본딩(Cell과 Peri를 따로 만들어 붙이는 구조)이 쓰는 것과 같은 방식입니다(연구용 시편, 제품 단면 아님). 출처: Hsu, W.-Y. 외, Low-Temperature Cu/SiO2 Hybrid Bonding with Low Contact Resistance Using (111)-Oriented Cu Surfaces, Materials 2022, 15(5), 1888, 그림 6(b), CC BY 4.0. 잘라 내고 원 그림의 라벨 · 화살표를 지우고 대비를 조정했습니다. 전략 2는 삼성 FMS 2026 전시의 zHBM 모형 사진으로, xPU 위에 Core Die를 바로 쌓는 3D 메모리 구조입니다.</a:t>
             </a:r>
           </a:p>
           <a:p>
@@ -619,7 +619,7 @@
           </a:p>
           <a:p>
             <a:r>
-              <a:t>[이미지] 전략 1은 삼성 FMS 2026 전시의 Bonding V-NAND 적층 모형 사진(Cell과 Peri를 따로 만들어 붙이는 본딩 구조), 전략 2는 3D DRAM 구조 개념 렌더(셀 층을 수평으로 쌓고 아래 Peri 다이에 붙인 구조, 실물 사진 아님)입니다.</a:t>
+              <a:t>[이미지] 전략 1은 웨이퍼 간 Cu/SiO2 하이브리드 본딩의 단면 SEM 사진입니다. 위아래 웨이퍼의 Cu 패드가 맞붙은 가로 선이 본딩 계면이고, NAND의 CMOS 본딩(Cell과 Peri를 따로 만들어 붙이는 구조)이 쓰는 것과 같은 방식입니다(연구용 시편, 제품 단면 아님). 출처: Hsu, W.-Y. 외, Low-Temperature Cu/SiO2 Hybrid Bonding with Low Contact Resistance Using (111)-Oriented Cu Surfaces, Materials 2022, 15(5), 1888, 그림 6(b), CC BY 4.0. 잘라 내고 원 그림의 라벨 · 화살표를 지우고 대비를 조정했습니다. 전략 2는 삼성 FMS 2026 전시의 zHBM 모형 사진으로, xPU 위에 Core Die를 바로 쌓는 3D 메모리 구조입니다.</a:t>
             </a:r>
           </a:p>
           <a:p>
@@ -714,7 +714,7 @@
           </a:p>
           <a:p>
             <a:r>
-              <a:t>[이미지] 전략 1은 삼성 FMS 2026 전시의 Bonding V-NAND 적층 모형 사진(Cell과 Peri를 따로 만들어 붙이는 본딩 구조), 전략 2는 3D DRAM 구조 개념 렌더(셀 층을 수평으로 쌓고 아래 Peri 다이에 붙인 구조, 실물 사진 아님)입니다.</a:t>
+              <a:t>[이미지] 전략 1은 웨이퍼 간 Cu/SiO2 하이브리드 본딩의 단면 SEM 사진입니다. 위아래 웨이퍼의 Cu 패드가 맞붙은 가로 선이 본딩 계면이고, NAND의 CMOS 본딩(Cell과 Peri를 따로 만들어 붙이는 구조)이 쓰는 것과 같은 방식입니다(연구용 시편, 제품 단면 아님). 출처: Hsu, W.-Y. 외, Low-Temperature Cu/SiO2 Hybrid Bonding with Low Contact Resistance Using (111)-Oriented Cu Surfaces, Materials 2022, 15(5), 1888, 그림 6(b), CC BY 4.0. 잘라 내고 원 그림의 라벨 · 화살표를 지우고 대비를 조정했습니다. 전략 2는 삼성 FMS 2026 전시의 zHBM 모형 사진으로, xPU 위에 Core Die를 바로 쌓는 3D 메모리 구조입니다.</a:t>
             </a:r>
           </a:p>
           <a:p>
@@ -4788,7 +4788,7 @@
       </p:sp>
       <p:pic>
         <p:nvPicPr>
-          <p:cNvPr id="25" name="Picture 24" descr="bonding.jpg"/>
+          <p:cNvPr id="25" name="Picture 24" descr="bonding_sem.jpg"/>
           <p:cNvPicPr>
             <a:picLocks noChangeAspect="1"/>
           </p:cNvPicPr>
@@ -4802,8 +4802,8 @@
         </p:blipFill>
         <p:spPr>
           <a:xfrm>
-            <a:off x="2898648" y="3320986"/>
-            <a:ext cx="1371600" cy="1441323"/>
+            <a:off x="2898648" y="3470208"/>
+            <a:ext cx="1371600" cy="777118"/>
           </a:xfrm>
           <a:prstGeom prst="rect">
             <a:avLst/>
@@ -4812,14 +4812,54 @@
       </p:pic>
       <p:sp>
         <p:nvSpPr>
-          <p:cNvPr id="26" name="Rectangle 25"/>
+          <p:cNvPr id="26" name="TextBox 25"/>
+          <p:cNvSpPr txBox="1"/>
+          <p:nvPr/>
+        </p:nvSpPr>
+        <p:spPr>
+          <a:xfrm>
+            <a:off x="2807208" y="4302191"/>
+            <a:ext cx="1554480" cy="292608"/>
+          </a:xfrm>
+          <a:prstGeom prst="rect">
+            <a:avLst/>
+          </a:prstGeom>
+          <a:noFill/>
+        </p:spPr>
+        <p:txBody>
+          <a:bodyPr wrap="square" anchor="t" lIns="0" rIns="0" tIns="0" bIns="0">
+            <a:spAutoFit/>
+          </a:bodyPr>
+          <a:lstStyle/>
+          <a:p>
+            <a:pPr algn="ctr">
+              <a:lnSpc>
+                <a:spcPct val="110000"/>
+              </a:lnSpc>
+            </a:pPr>
+            <a:r>
+              <a:rPr sz="1600" b="0">
+                <a:solidFill>
+                  <a:srgbClr val="555555"/>
+                </a:solidFill>
+                <a:latin typeface="Arial"/>
+                <a:ea typeface="Arial"/>
+              </a:rPr>
+              <a:t>본딩 계면 SEM</a:t>
+            </a:r>
+          </a:p>
+        </p:txBody>
+      </p:sp>
+      <p:sp>
+        <p:nvSpPr>
+          <p:cNvPr id="27" name="Rectangle 26"/>
           <p:cNvSpPr/>
           <p:nvPr/>
         </p:nvSpPr>
         <p:spPr>
           <a:xfrm>
-            <a:off x="2898648" y="3320986"/>
-            <a:ext cx="1371600" cy="1441323"/>
+            <a:off x="2898648" y="3470208"/>
+            <a:ext cx="1371600" cy="777118"/>
           </a:xfrm>
           <a:prstGeom prst="rect">
             <a:avLst/>
@@ -4856,7 +4896,7 @@
       </p:sp>
       <p:sp>
         <p:nvSpPr>
-          <p:cNvPr id="27" name="Rounded Rectangle 26"/>
+          <p:cNvPr id="28" name="Rounded Rectangle 27"/>
           <p:cNvSpPr/>
           <p:nvPr/>
         </p:nvSpPr>
@@ -4904,7 +4944,7 @@
       </p:sp>
       <p:pic>
         <p:nvPicPr>
-          <p:cNvPr id="28" name="Picture 27" descr="building-factory-2_blue.png"/>
+          <p:cNvPr id="29" name="Picture 28" descr="building-factory-2_blue.png"/>
           <p:cNvPicPr>
             <a:picLocks noChangeAspect="1"/>
           </p:cNvPicPr>
@@ -4928,7 +4968,7 @@
       </p:pic>
       <p:sp>
         <p:nvSpPr>
-          <p:cNvPr id="29" name="TextBox 28"/>
+          <p:cNvPr id="30" name="TextBox 29"/>
           <p:cNvSpPr txBox="1"/>
           <p:nvPr/>
         </p:nvSpPr>
@@ -4968,7 +5008,7 @@
       </p:sp>
       <p:sp>
         <p:nvSpPr>
-          <p:cNvPr id="30" name="Rectangle 29"/>
+          <p:cNvPr id="31" name="Rectangle 30"/>
           <p:cNvSpPr/>
           <p:nvPr/>
         </p:nvSpPr>
@@ -5012,7 +5052,7 @@
       </p:sp>
       <p:sp>
         <p:nvSpPr>
-          <p:cNvPr id="31" name="Rectangle 30"/>
+          <p:cNvPr id="32" name="Rectangle 31"/>
           <p:cNvSpPr/>
           <p:nvPr/>
         </p:nvSpPr>
@@ -5056,7 +5096,7 @@
       </p:sp>
       <p:sp>
         <p:nvSpPr>
-          <p:cNvPr id="32" name="TextBox 31"/>
+          <p:cNvPr id="33" name="TextBox 32"/>
           <p:cNvSpPr txBox="1"/>
           <p:nvPr/>
         </p:nvSpPr>
@@ -5096,7 +5136,7 @@
       </p:sp>
       <p:sp>
         <p:nvSpPr>
-          <p:cNvPr id="33" name="TextBox 32"/>
+          <p:cNvPr id="34" name="TextBox 33"/>
           <p:cNvSpPr txBox="1"/>
           <p:nvPr/>
         </p:nvSpPr>
@@ -5136,7 +5176,7 @@
       </p:sp>
       <p:sp>
         <p:nvSpPr>
-          <p:cNvPr id="34" name="Left-Right Arrow 33"/>
+          <p:cNvPr id="35" name="Left-Right Arrow 34"/>
           <p:cNvSpPr/>
           <p:nvPr/>
         </p:nvSpPr>
@@ -5180,7 +5220,7 @@
       </p:sp>
       <p:sp>
         <p:nvSpPr>
-          <p:cNvPr id="35" name="Rectangle 34"/>
+          <p:cNvPr id="36" name="Rectangle 35"/>
           <p:cNvSpPr/>
           <p:nvPr/>
         </p:nvSpPr>
@@ -5224,7 +5264,7 @@
       </p:sp>
       <p:sp>
         <p:nvSpPr>
-          <p:cNvPr id="36" name="TextBox 35"/>
+          <p:cNvPr id="37" name="TextBox 36"/>
           <p:cNvSpPr txBox="1"/>
           <p:nvPr/>
         </p:nvSpPr>
@@ -5315,7 +5355,7 @@
       </p:sp>
       <p:sp>
         <p:nvSpPr>
-          <p:cNvPr id="37" name="Rounded Rectangle 36"/>
+          <p:cNvPr id="38" name="Rounded Rectangle 37"/>
           <p:cNvSpPr/>
           <p:nvPr/>
         </p:nvSpPr>
@@ -5363,7 +5403,7 @@
       </p:sp>
       <p:sp>
         <p:nvSpPr>
-          <p:cNvPr id="38" name="Rounded Rectangle 37"/>
+          <p:cNvPr id="39" name="Rounded Rectangle 38"/>
           <p:cNvSpPr/>
           <p:nvPr/>
         </p:nvSpPr>
@@ -5411,7 +5451,7 @@
       </p:sp>
       <p:sp>
         <p:nvSpPr>
-          <p:cNvPr id="39" name="Rounded Rectangle 38"/>
+          <p:cNvPr id="40" name="Rounded Rectangle 39"/>
           <p:cNvSpPr/>
           <p:nvPr/>
         </p:nvSpPr>
@@ -5459,7 +5499,7 @@
       </p:sp>
       <p:sp>
         <p:nvSpPr>
-          <p:cNvPr id="40" name="Rounded Rectangle 39"/>
+          <p:cNvPr id="41" name="Rounded Rectangle 40"/>
           <p:cNvSpPr/>
           <p:nvPr/>
         </p:nvSpPr>
@@ -5507,7 +5547,7 @@
       </p:sp>
       <p:sp>
         <p:nvSpPr>
-          <p:cNvPr id="41" name="TextBox 40"/>
+          <p:cNvPr id="42" name="TextBox 41"/>
           <p:cNvSpPr txBox="1"/>
           <p:nvPr/>
         </p:nvSpPr>
@@ -5564,7 +5604,7 @@
       </p:sp>
       <p:sp>
         <p:nvSpPr>
-          <p:cNvPr id="42" name="TextBox 41"/>
+          <p:cNvPr id="43" name="TextBox 42"/>
           <p:cNvSpPr txBox="1"/>
           <p:nvPr/>
         </p:nvSpPr>
@@ -5604,7 +5644,7 @@
       </p:sp>
       <p:sp>
         <p:nvSpPr>
-          <p:cNvPr id="43" name="Right Arrow 42"/>
+          <p:cNvPr id="44" name="Right Arrow 43"/>
           <p:cNvSpPr/>
           <p:nvPr/>
         </p:nvSpPr>
@@ -5648,7 +5688,7 @@
       </p:sp>
       <p:sp>
         <p:nvSpPr>
-          <p:cNvPr id="44" name="Rounded Rectangle 43"/>
+          <p:cNvPr id="45" name="Rounded Rectangle 44"/>
           <p:cNvSpPr/>
           <p:nvPr/>
         </p:nvSpPr>
@@ -5694,7 +5734,7 @@
       </p:sp>
       <p:sp>
         <p:nvSpPr>
-          <p:cNvPr id="45" name="TextBox 44"/>
+          <p:cNvPr id="46" name="TextBox 45"/>
           <p:cNvSpPr txBox="1"/>
           <p:nvPr/>
         </p:nvSpPr>
@@ -5734,7 +5774,7 @@
       </p:sp>
       <p:cxnSp>
         <p:nvCxnSpPr>
-          <p:cNvPr id="46" name="Connector 45"/>
+          <p:cNvPr id="47" name="Connector 46"/>
           <p:cNvCxnSpPr/>
           <p:nvPr/>
         </p:nvCxnSpPr>
@@ -5770,7 +5810,7 @@
       </p:cxnSp>
       <p:sp>
         <p:nvSpPr>
-          <p:cNvPr id="47" name="Rounded Rectangle 46"/>
+          <p:cNvPr id="48" name="Rounded Rectangle 47"/>
           <p:cNvSpPr/>
           <p:nvPr/>
         </p:nvSpPr>
@@ -5818,7 +5858,7 @@
       </p:sp>
       <p:sp>
         <p:nvSpPr>
-          <p:cNvPr id="48" name="TextBox 47"/>
+          <p:cNvPr id="49" name="TextBox 48"/>
           <p:cNvSpPr txBox="1"/>
           <p:nvPr/>
         </p:nvSpPr>
@@ -5858,7 +5898,7 @@
       </p:sp>
       <p:sp>
         <p:nvSpPr>
-          <p:cNvPr id="49" name="TextBox 48"/>
+          <p:cNvPr id="50" name="TextBox 49"/>
           <p:cNvSpPr txBox="1"/>
           <p:nvPr/>
         </p:nvSpPr>
@@ -5898,7 +5938,7 @@
       </p:sp>
       <p:sp>
         <p:nvSpPr>
-          <p:cNvPr id="50" name="Rectangle 49"/>
+          <p:cNvPr id="51" name="Rectangle 50"/>
           <p:cNvSpPr/>
           <p:nvPr/>
         </p:nvSpPr>
@@ -5942,7 +5982,7 @@
       </p:sp>
       <p:sp>
         <p:nvSpPr>
-          <p:cNvPr id="51" name="TextBox 50"/>
+          <p:cNvPr id="52" name="TextBox 51"/>
           <p:cNvSpPr txBox="1"/>
           <p:nvPr/>
         </p:nvSpPr>
@@ -6050,7 +6090,7 @@
       </p:sp>
       <p:sp>
         <p:nvSpPr>
-          <p:cNvPr id="52" name="Rounded Rectangle 51"/>
+          <p:cNvPr id="53" name="Rounded Rectangle 52"/>
           <p:cNvSpPr/>
           <p:nvPr/>
         </p:nvSpPr>
@@ -6098,7 +6138,7 @@
       </p:sp>
       <p:sp>
         <p:nvSpPr>
-          <p:cNvPr id="53" name="Rounded Rectangle 52"/>
+          <p:cNvPr id="54" name="Rounded Rectangle 53"/>
           <p:cNvSpPr/>
           <p:nvPr/>
         </p:nvSpPr>
@@ -6146,7 +6186,7 @@
       </p:sp>
       <p:sp>
         <p:nvSpPr>
-          <p:cNvPr id="54" name="TextBox 53"/>
+          <p:cNvPr id="55" name="TextBox 54"/>
           <p:cNvSpPr txBox="1"/>
           <p:nvPr/>
         </p:nvSpPr>
@@ -6186,7 +6226,7 @@
       </p:sp>
       <p:cxnSp>
         <p:nvCxnSpPr>
-          <p:cNvPr id="55" name="Connector 54"/>
+          <p:cNvPr id="56" name="Connector 55"/>
           <p:cNvCxnSpPr/>
           <p:nvPr/>
         </p:nvCxnSpPr>
@@ -6222,7 +6262,7 @@
       </p:cxnSp>
       <p:sp>
         <p:nvSpPr>
-          <p:cNvPr id="56" name="Rounded Rectangle 55"/>
+          <p:cNvPr id="57" name="Rounded Rectangle 56"/>
           <p:cNvSpPr/>
           <p:nvPr/>
         </p:nvSpPr>
@@ -6268,7 +6308,7 @@
       </p:sp>
       <p:sp>
         <p:nvSpPr>
-          <p:cNvPr id="57" name="TextBox 56"/>
+          <p:cNvPr id="58" name="TextBox 57"/>
           <p:cNvSpPr txBox="1"/>
           <p:nvPr/>
         </p:nvSpPr>
@@ -6308,7 +6348,7 @@
       </p:sp>
       <p:cxnSp>
         <p:nvCxnSpPr>
-          <p:cNvPr id="58" name="Connector 57"/>
+          <p:cNvPr id="59" name="Connector 58"/>
           <p:cNvCxnSpPr/>
           <p:nvPr/>
         </p:nvCxnSpPr>
@@ -6344,7 +6384,7 @@
       </p:cxnSp>
       <p:sp>
         <p:nvSpPr>
-          <p:cNvPr id="59" name="Rounded Rectangle 58"/>
+          <p:cNvPr id="60" name="Rounded Rectangle 59"/>
           <p:cNvSpPr/>
           <p:nvPr/>
         </p:nvSpPr>
@@ -6390,7 +6430,7 @@
       </p:sp>
       <p:sp>
         <p:nvSpPr>
-          <p:cNvPr id="60" name="TextBox 59"/>
+          <p:cNvPr id="61" name="TextBox 60"/>
           <p:cNvSpPr txBox="1"/>
           <p:nvPr/>
         </p:nvSpPr>
@@ -6430,7 +6470,7 @@
       </p:sp>
       <p:cxnSp>
         <p:nvCxnSpPr>
-          <p:cNvPr id="61" name="Connector 60"/>
+          <p:cNvPr id="62" name="Connector 61"/>
           <p:cNvCxnSpPr/>
           <p:nvPr/>
         </p:nvCxnSpPr>
@@ -6466,7 +6506,7 @@
       </p:cxnSp>
       <p:sp>
         <p:nvSpPr>
-          <p:cNvPr id="62" name="Rounded Rectangle 61"/>
+          <p:cNvPr id="63" name="Rounded Rectangle 62"/>
           <p:cNvSpPr/>
           <p:nvPr/>
         </p:nvSpPr>
@@ -6512,7 +6552,7 @@
       </p:sp>
       <p:sp>
         <p:nvSpPr>
-          <p:cNvPr id="63" name="TextBox 62"/>
+          <p:cNvPr id="64" name="TextBox 63"/>
           <p:cNvSpPr txBox="1"/>
           <p:nvPr/>
         </p:nvSpPr>
@@ -6552,7 +6592,7 @@
       </p:sp>
       <p:sp>
         <p:nvSpPr>
-          <p:cNvPr id="64" name="TextBox 63"/>
+          <p:cNvPr id="65" name="TextBox 64"/>
           <p:cNvSpPr txBox="1"/>
           <p:nvPr/>
         </p:nvSpPr>
@@ -6592,7 +6632,7 @@
       </p:sp>
       <p:sp>
         <p:nvSpPr>
-          <p:cNvPr id="65" name="Rectangle 64"/>
+          <p:cNvPr id="66" name="Rectangle 65"/>
           <p:cNvSpPr/>
           <p:nvPr/>
         </p:nvSpPr>
@@ -6636,7 +6676,7 @@
       </p:sp>
       <p:sp>
         <p:nvSpPr>
-          <p:cNvPr id="66" name="TextBox 65"/>
+          <p:cNvPr id="67" name="TextBox 66"/>
           <p:cNvSpPr txBox="1"/>
           <p:nvPr/>
         </p:nvSpPr>
@@ -6744,7 +6784,7 @@
       </p:sp>
       <p:sp>
         <p:nvSpPr>
-          <p:cNvPr id="67" name="Rounded Rectangle 66"/>
+          <p:cNvPr id="68" name="Rounded Rectangle 67"/>
           <p:cNvSpPr/>
           <p:nvPr/>
         </p:nvSpPr>
@@ -6790,7 +6830,7 @@
       </p:sp>
       <p:sp>
         <p:nvSpPr>
-          <p:cNvPr id="68" name="Rounded Rectangle 67"/>
+          <p:cNvPr id="69" name="Rounded Rectangle 68"/>
           <p:cNvSpPr/>
           <p:nvPr/>
         </p:nvSpPr>
@@ -6836,7 +6876,7 @@
       </p:sp>
       <p:sp>
         <p:nvSpPr>
-          <p:cNvPr id="69" name="TextBox 68"/>
+          <p:cNvPr id="70" name="TextBox 69"/>
           <p:cNvSpPr txBox="1"/>
           <p:nvPr/>
         </p:nvSpPr>
@@ -6876,7 +6916,7 @@
       </p:sp>
       <p:sp>
         <p:nvSpPr>
-          <p:cNvPr id="70" name="TextBox 69"/>
+          <p:cNvPr id="71" name="TextBox 70"/>
           <p:cNvSpPr txBox="1"/>
           <p:nvPr/>
         </p:nvSpPr>
@@ -6950,7 +6990,7 @@
       </p:sp>
       <p:pic>
         <p:nvPicPr>
-          <p:cNvPr id="71" name="Picture 70" descr="render_dram3d.png"/>
+          <p:cNvPr id="72" name="Picture 71" descr="zhbm.jpg"/>
           <p:cNvPicPr>
             <a:picLocks noChangeAspect="1"/>
           </p:cNvPicPr>
@@ -6964,8 +7004,8 @@
         </p:blipFill>
         <p:spPr>
           <a:xfrm>
-            <a:off x="2898648" y="5390915"/>
-            <a:ext cx="1371600" cy="995641"/>
+            <a:off x="3023625" y="5138928"/>
+            <a:ext cx="1121645" cy="1133855"/>
           </a:xfrm>
           <a:prstGeom prst="rect">
             <a:avLst/>
@@ -6974,7 +7014,91 @@
       </p:pic>
       <p:sp>
         <p:nvSpPr>
-          <p:cNvPr id="72" name="Rounded Rectangle 71"/>
+          <p:cNvPr id="73" name="TextBox 72"/>
+          <p:cNvSpPr txBox="1"/>
+          <p:nvPr/>
+        </p:nvSpPr>
+        <p:spPr>
+          <a:xfrm>
+            <a:off x="2807208" y="6327647"/>
+            <a:ext cx="1554480" cy="292608"/>
+          </a:xfrm>
+          <a:prstGeom prst="rect">
+            <a:avLst/>
+          </a:prstGeom>
+          <a:noFill/>
+        </p:spPr>
+        <p:txBody>
+          <a:bodyPr wrap="square" anchor="t" lIns="0" rIns="0" tIns="0" bIns="0">
+            <a:spAutoFit/>
+          </a:bodyPr>
+          <a:lstStyle/>
+          <a:p>
+            <a:pPr algn="ctr">
+              <a:lnSpc>
+                <a:spcPct val="110000"/>
+              </a:lnSpc>
+            </a:pPr>
+            <a:r>
+              <a:rPr sz="1600" b="0">
+                <a:solidFill>
+                  <a:srgbClr val="555555"/>
+                </a:solidFill>
+                <a:latin typeface="Arial"/>
+                <a:ea typeface="Arial"/>
+              </a:rPr>
+              <a:t>삼성 zHBM</a:t>
+            </a:r>
+          </a:p>
+        </p:txBody>
+      </p:sp>
+      <p:sp>
+        <p:nvSpPr>
+          <p:cNvPr id="74" name="Rectangle 73"/>
+          <p:cNvSpPr/>
+          <p:nvPr/>
+        </p:nvSpPr>
+        <p:spPr>
+          <a:xfrm>
+            <a:off x="3023625" y="5138928"/>
+            <a:ext cx="1121645" cy="1133855"/>
+          </a:xfrm>
+          <a:prstGeom prst="rect">
+            <a:avLst/>
+          </a:prstGeom>
+          <a:noFill/>
+          <a:ln w="9525">
+            <a:solidFill>
+              <a:srgbClr val="D9D9D9"/>
+            </a:solidFill>
+          </a:ln>
+          <a:effectLst/>
+        </p:spPr>
+        <p:style>
+          <a:lnRef idx="1">
+            <a:schemeClr val="accent1"/>
+          </a:lnRef>
+          <a:fillRef idx="3">
+            <a:schemeClr val="accent1"/>
+          </a:fillRef>
+          <a:effectRef idx="2">
+            <a:schemeClr val="accent1"/>
+          </a:effectRef>
+          <a:fontRef idx="minor">
+            <a:schemeClr val="lt1"/>
+          </a:fontRef>
+        </p:style>
+        <p:txBody>
+          <a:bodyPr rtlCol="0" anchor="ctr"/>
+          <a:lstStyle/>
+          <a:p>
+            <a:pPr algn="ctr"/>
+          </a:p>
+        </p:txBody>
+      </p:sp>
+      <p:sp>
+        <p:nvSpPr>
+          <p:cNvPr id="75" name="Rounded Rectangle 74"/>
           <p:cNvSpPr/>
           <p:nvPr/>
         </p:nvSpPr>
@@ -7022,7 +7146,7 @@
       </p:sp>
       <p:sp>
         <p:nvSpPr>
-          <p:cNvPr id="73" name="Rounded Rectangle 72"/>
+          <p:cNvPr id="76" name="Rounded Rectangle 75"/>
           <p:cNvSpPr/>
           <p:nvPr/>
         </p:nvSpPr>
@@ -7070,7 +7194,7 @@
       </p:sp>
       <p:sp>
         <p:nvSpPr>
-          <p:cNvPr id="74" name="Rectangle 73"/>
+          <p:cNvPr id="77" name="Rectangle 76"/>
           <p:cNvSpPr/>
           <p:nvPr/>
         </p:nvSpPr>
@@ -7114,7 +7238,7 @@
       </p:sp>
       <p:sp>
         <p:nvSpPr>
-          <p:cNvPr id="75" name="Rectangle 74"/>
+          <p:cNvPr id="78" name="Rectangle 77"/>
           <p:cNvSpPr/>
           <p:nvPr/>
         </p:nvSpPr>
@@ -7158,7 +7282,7 @@
       </p:sp>
       <p:sp>
         <p:nvSpPr>
-          <p:cNvPr id="76" name="Rectangle 75"/>
+          <p:cNvPr id="79" name="Rectangle 78"/>
           <p:cNvSpPr/>
           <p:nvPr/>
         </p:nvSpPr>
@@ -7202,7 +7326,7 @@
       </p:sp>
       <p:sp>
         <p:nvSpPr>
-          <p:cNvPr id="77" name="Rectangle 76"/>
+          <p:cNvPr id="80" name="Rectangle 79"/>
           <p:cNvSpPr/>
           <p:nvPr/>
         </p:nvSpPr>
@@ -7246,7 +7370,7 @@
       </p:sp>
       <p:sp>
         <p:nvSpPr>
-          <p:cNvPr id="78" name="Rectangle 77"/>
+          <p:cNvPr id="81" name="Rectangle 80"/>
           <p:cNvSpPr/>
           <p:nvPr/>
         </p:nvSpPr>
@@ -7290,7 +7414,7 @@
       </p:sp>
       <p:sp>
         <p:nvSpPr>
-          <p:cNvPr id="79" name="Rectangle 78"/>
+          <p:cNvPr id="82" name="Rectangle 81"/>
           <p:cNvSpPr/>
           <p:nvPr/>
         </p:nvSpPr>
@@ -7334,7 +7458,7 @@
       </p:sp>
       <p:sp>
         <p:nvSpPr>
-          <p:cNvPr id="80" name="Rectangle 79"/>
+          <p:cNvPr id="83" name="Rectangle 82"/>
           <p:cNvSpPr/>
           <p:nvPr/>
         </p:nvSpPr>
@@ -7378,7 +7502,7 @@
       </p:sp>
       <p:sp>
         <p:nvSpPr>
-          <p:cNvPr id="81" name="Rectangle 80"/>
+          <p:cNvPr id="84" name="Rectangle 83"/>
           <p:cNvSpPr/>
           <p:nvPr/>
         </p:nvSpPr>
@@ -7422,7 +7546,7 @@
       </p:sp>
       <p:sp>
         <p:nvSpPr>
-          <p:cNvPr id="82" name="Rectangle 81"/>
+          <p:cNvPr id="85" name="Rectangle 84"/>
           <p:cNvSpPr/>
           <p:nvPr/>
         </p:nvSpPr>
@@ -7466,7 +7590,7 @@
       </p:sp>
       <p:pic>
         <p:nvPicPr>
-          <p:cNvPr id="83" name="Picture 82" descr="arrows-exchange_blue.png"/>
+          <p:cNvPr id="86" name="Picture 85" descr="arrows-exchange_blue.png"/>
           <p:cNvPicPr>
             <a:picLocks noChangeAspect="1"/>
           </p:cNvPicPr>
@@ -7490,7 +7614,7 @@
       </p:pic>
       <p:sp>
         <p:nvSpPr>
-          <p:cNvPr id="84" name="Oval 83"/>
+          <p:cNvPr id="87" name="Oval 86"/>
           <p:cNvSpPr/>
           <p:nvPr/>
         </p:nvSpPr>
@@ -7534,7 +7658,7 @@
       </p:sp>
       <p:pic>
         <p:nvPicPr>
-          <p:cNvPr id="85" name="Picture 84" descr="cpu-2_white.png"/>
+          <p:cNvPr id="88" name="Picture 87" descr="cpu-2_white.png"/>
           <p:cNvPicPr>
             <a:picLocks noChangeAspect="1"/>
           </p:cNvPicPr>
@@ -7558,7 +7682,7 @@
       </p:pic>
       <p:sp>
         <p:nvSpPr>
-          <p:cNvPr id="86" name="TextBox 85"/>
+          <p:cNvPr id="89" name="TextBox 88"/>
           <p:cNvSpPr txBox="1"/>
           <p:nvPr/>
         </p:nvSpPr>
@@ -7598,7 +7722,7 @@
       </p:sp>
       <p:sp>
         <p:nvSpPr>
-          <p:cNvPr id="87" name="TextBox 86"/>
+          <p:cNvPr id="90" name="TextBox 89"/>
           <p:cNvSpPr txBox="1"/>
           <p:nvPr/>
         </p:nvSpPr>
@@ -7638,7 +7762,7 @@
       </p:sp>
       <p:sp>
         <p:nvSpPr>
-          <p:cNvPr id="88" name="Rectangle 87"/>
+          <p:cNvPr id="91" name="Rectangle 90"/>
           <p:cNvSpPr/>
           <p:nvPr/>
         </p:nvSpPr>
@@ -7682,7 +7806,7 @@
       </p:sp>
       <p:sp>
         <p:nvSpPr>
-          <p:cNvPr id="89" name="TextBox 88"/>
+          <p:cNvPr id="92" name="TextBox 91"/>
           <p:cNvSpPr txBox="1"/>
           <p:nvPr/>
         </p:nvSpPr>
@@ -7790,7 +7914,7 @@
       </p:sp>
       <p:sp>
         <p:nvSpPr>
-          <p:cNvPr id="90" name="Rounded Rectangle 89"/>
+          <p:cNvPr id="93" name="Rounded Rectangle 92"/>
           <p:cNvSpPr/>
           <p:nvPr/>
         </p:nvSpPr>
@@ -7838,7 +7962,7 @@
       </p:sp>
       <p:pic>
         <p:nvPicPr>
-          <p:cNvPr id="91" name="Picture 90" descr="shield-check_blue.png"/>
+          <p:cNvPr id="94" name="Picture 93" descr="shield-check_blue.png"/>
           <p:cNvPicPr>
             <a:picLocks noChangeAspect="1"/>
           </p:cNvPicPr>
@@ -7862,7 +7986,7 @@
       </p:pic>
       <p:sp>
         <p:nvSpPr>
-          <p:cNvPr id="92" name="TextBox 91"/>
+          <p:cNvPr id="95" name="TextBox 94"/>
           <p:cNvSpPr txBox="1"/>
           <p:nvPr/>
         </p:nvSpPr>
@@ -7902,7 +8026,7 @@
       </p:sp>
       <p:cxnSp>
         <p:nvCxnSpPr>
-          <p:cNvPr id="93" name="Connector 92"/>
+          <p:cNvPr id="96" name="Connector 95"/>
           <p:cNvCxnSpPr/>
           <p:nvPr/>
         </p:nvCxnSpPr>
@@ -7937,7 +8061,7 @@
       </p:cxnSp>
       <p:sp>
         <p:nvSpPr>
-          <p:cNvPr id="94" name="Diamond 93"/>
+          <p:cNvPr id="97" name="Diamond 96"/>
           <p:cNvSpPr/>
           <p:nvPr/>
         </p:nvSpPr>
@@ -7981,7 +8105,7 @@
       </p:sp>
       <p:sp>
         <p:nvSpPr>
-          <p:cNvPr id="95" name="Diamond 94"/>
+          <p:cNvPr id="98" name="Diamond 97"/>
           <p:cNvSpPr/>
           <p:nvPr/>
         </p:nvSpPr>
@@ -8025,7 +8149,7 @@
       </p:sp>
       <p:sp>
         <p:nvSpPr>
-          <p:cNvPr id="96" name="Diamond 95"/>
+          <p:cNvPr id="99" name="Diamond 98"/>
           <p:cNvSpPr/>
           <p:nvPr/>
         </p:nvSpPr>
@@ -8069,7 +8193,7 @@
       </p:sp>
       <p:sp>
         <p:nvSpPr>
-          <p:cNvPr id="97" name="TextBox 96"/>
+          <p:cNvPr id="100" name="TextBox 99"/>
           <p:cNvSpPr txBox="1"/>
           <p:nvPr/>
         </p:nvSpPr>
@@ -8109,7 +8233,7 @@
       </p:sp>
       <p:sp>
         <p:nvSpPr>
-          <p:cNvPr id="98" name="Rectangle 97"/>
+          <p:cNvPr id="101" name="Rectangle 100"/>
           <p:cNvSpPr/>
           <p:nvPr/>
         </p:nvSpPr>
@@ -8153,7 +8277,7 @@
       </p:sp>
       <p:sp>
         <p:nvSpPr>
-          <p:cNvPr id="99" name="TextBox 98"/>
+          <p:cNvPr id="102" name="TextBox 101"/>
           <p:cNvSpPr txBox="1"/>
           <p:nvPr/>
         </p:nvSpPr>
@@ -8261,7 +8385,7 @@
       </p:sp>
       <p:sp>
         <p:nvSpPr>
-          <p:cNvPr id="100" name="Rounded Rectangle 99"/>
+          <p:cNvPr id="103" name="Rounded Rectangle 102"/>
           <p:cNvSpPr/>
           <p:nvPr/>
         </p:nvSpPr>
@@ -8309,7 +8433,7 @@
       </p:sp>
       <p:sp>
         <p:nvSpPr>
-          <p:cNvPr id="101" name="Rectangle 100"/>
+          <p:cNvPr id="104" name="Rectangle 103"/>
           <p:cNvSpPr/>
           <p:nvPr/>
         </p:nvSpPr>
@@ -8353,7 +8477,7 @@
       </p:sp>
       <p:sp>
         <p:nvSpPr>
-          <p:cNvPr id="102" name="Rectangle 101"/>
+          <p:cNvPr id="105" name="Rectangle 104"/>
           <p:cNvSpPr/>
           <p:nvPr/>
         </p:nvSpPr>
@@ -8397,7 +8521,7 @@
       </p:sp>
       <p:sp>
         <p:nvSpPr>
-          <p:cNvPr id="103" name="Rectangle 102"/>
+          <p:cNvPr id="106" name="Rectangle 105"/>
           <p:cNvSpPr/>
           <p:nvPr/>
         </p:nvSpPr>
@@ -8441,7 +8565,7 @@
       </p:sp>
       <p:sp>
         <p:nvSpPr>
-          <p:cNvPr id="104" name="Rectangle 103"/>
+          <p:cNvPr id="107" name="Rectangle 106"/>
           <p:cNvSpPr/>
           <p:nvPr/>
         </p:nvSpPr>
@@ -8485,7 +8609,7 @@
       </p:sp>
       <p:sp>
         <p:nvSpPr>
-          <p:cNvPr id="105" name="Rectangle 104"/>
+          <p:cNvPr id="108" name="Rectangle 107"/>
           <p:cNvSpPr/>
           <p:nvPr/>
         </p:nvSpPr>
@@ -8529,7 +8653,7 @@
       </p:sp>
       <p:sp>
         <p:nvSpPr>
-          <p:cNvPr id="106" name="TextBox 105"/>
+          <p:cNvPr id="109" name="TextBox 108"/>
           <p:cNvSpPr txBox="1"/>
           <p:nvPr/>
         </p:nvSpPr>
@@ -8569,7 +8693,7 @@
       </p:sp>
       <p:sp>
         <p:nvSpPr>
-          <p:cNvPr id="107" name="Rectangle 106"/>
+          <p:cNvPr id="110" name="Rectangle 109"/>
           <p:cNvSpPr/>
           <p:nvPr/>
         </p:nvSpPr>
@@ -8613,7 +8737,7 @@
       </p:sp>
       <p:sp>
         <p:nvSpPr>
-          <p:cNvPr id="108" name="Rectangle 107"/>
+          <p:cNvPr id="111" name="Rectangle 110"/>
           <p:cNvSpPr/>
           <p:nvPr/>
         </p:nvSpPr>
@@ -8657,7 +8781,7 @@
       </p:sp>
       <p:sp>
         <p:nvSpPr>
-          <p:cNvPr id="109" name="Rectangle 108"/>
+          <p:cNvPr id="112" name="Rectangle 111"/>
           <p:cNvSpPr/>
           <p:nvPr/>
         </p:nvSpPr>
@@ -8701,7 +8825,7 @@
       </p:sp>
       <p:sp>
         <p:nvSpPr>
-          <p:cNvPr id="110" name="Rectangle 109"/>
+          <p:cNvPr id="113" name="Rectangle 112"/>
           <p:cNvSpPr/>
           <p:nvPr/>
         </p:nvSpPr>
@@ -8745,7 +8869,7 @@
       </p:sp>
       <p:sp>
         <p:nvSpPr>
-          <p:cNvPr id="111" name="Rectangle 110"/>
+          <p:cNvPr id="114" name="Rectangle 113"/>
           <p:cNvSpPr/>
           <p:nvPr/>
         </p:nvSpPr>
@@ -8789,7 +8913,7 @@
       </p:sp>
       <p:sp>
         <p:nvSpPr>
-          <p:cNvPr id="112" name="TextBox 111"/>
+          <p:cNvPr id="115" name="TextBox 114"/>
           <p:cNvSpPr txBox="1"/>
           <p:nvPr/>
         </p:nvSpPr>
@@ -8829,7 +8953,7 @@
       </p:sp>
       <p:sp>
         <p:nvSpPr>
-          <p:cNvPr id="113" name="Rectangle 112"/>
+          <p:cNvPr id="116" name="Rectangle 115"/>
           <p:cNvSpPr/>
           <p:nvPr/>
         </p:nvSpPr>
@@ -8873,7 +8997,7 @@
       </p:sp>
       <p:sp>
         <p:nvSpPr>
-          <p:cNvPr id="114" name="Rectangle 113"/>
+          <p:cNvPr id="117" name="Rectangle 116"/>
           <p:cNvSpPr/>
           <p:nvPr/>
         </p:nvSpPr>
@@ -8917,7 +9041,7 @@
       </p:sp>
       <p:sp>
         <p:nvSpPr>
-          <p:cNvPr id="115" name="Rectangle 114"/>
+          <p:cNvPr id="118" name="Rectangle 117"/>
           <p:cNvSpPr/>
           <p:nvPr/>
         </p:nvSpPr>
@@ -8961,7 +9085,7 @@
       </p:sp>
       <p:sp>
         <p:nvSpPr>
-          <p:cNvPr id="116" name="Rectangle 115"/>
+          <p:cNvPr id="119" name="Rectangle 118"/>
           <p:cNvSpPr/>
           <p:nvPr/>
         </p:nvSpPr>
@@ -9005,7 +9129,7 @@
       </p:sp>
       <p:sp>
         <p:nvSpPr>
-          <p:cNvPr id="117" name="Rectangle 116"/>
+          <p:cNvPr id="120" name="Rectangle 119"/>
           <p:cNvSpPr/>
           <p:nvPr/>
         </p:nvSpPr>
@@ -9049,7 +9173,7 @@
       </p:sp>
       <p:sp>
         <p:nvSpPr>
-          <p:cNvPr id="118" name="TextBox 117"/>
+          <p:cNvPr id="121" name="TextBox 120"/>
           <p:cNvSpPr txBox="1"/>
           <p:nvPr/>
         </p:nvSpPr>
@@ -9089,7 +9213,7 @@
       </p:sp>
       <p:sp>
         <p:nvSpPr>
-          <p:cNvPr id="119" name="TextBox 118"/>
+          <p:cNvPr id="122" name="TextBox 121"/>
           <p:cNvSpPr txBox="1"/>
           <p:nvPr/>
         </p:nvSpPr>
@@ -9129,7 +9253,7 @@
       </p:sp>
       <p:sp>
         <p:nvSpPr>
-          <p:cNvPr id="120" name="Rectangle 119"/>
+          <p:cNvPr id="123" name="Rectangle 122"/>
           <p:cNvSpPr/>
           <p:nvPr/>
         </p:nvSpPr>
@@ -9173,7 +9297,7 @@
       </p:sp>
       <p:sp>
         <p:nvSpPr>
-          <p:cNvPr id="121" name="TextBox 120"/>
+          <p:cNvPr id="124" name="TextBox 123"/>
           <p:cNvSpPr txBox="1"/>
           <p:nvPr/>
         </p:nvSpPr>
@@ -9281,7 +9405,7 @@
       </p:sp>
       <p:sp>
         <p:nvSpPr>
-          <p:cNvPr id="122" name="Rounded Rectangle 121"/>
+          <p:cNvPr id="125" name="Rounded Rectangle 124"/>
           <p:cNvSpPr/>
           <p:nvPr/>
         </p:nvSpPr>
@@ -9327,7 +9451,7 @@
       </p:sp>
       <p:sp>
         <p:nvSpPr>
-          <p:cNvPr id="123" name="Rounded Rectangle 122"/>
+          <p:cNvPr id="126" name="Rounded Rectangle 125"/>
           <p:cNvSpPr/>
           <p:nvPr/>
         </p:nvSpPr>
@@ -9373,7 +9497,7 @@
       </p:sp>
       <p:sp>
         <p:nvSpPr>
-          <p:cNvPr id="124" name="TextBox 123"/>
+          <p:cNvPr id="127" name="TextBox 126"/>
           <p:cNvSpPr txBox="1"/>
           <p:nvPr/>
         </p:nvSpPr>
@@ -9413,7 +9537,7 @@
       </p:sp>
       <p:sp>
         <p:nvSpPr>
-          <p:cNvPr id="125" name="TextBox 124"/>
+          <p:cNvPr id="128" name="TextBox 127"/>
           <p:cNvSpPr txBox="1"/>
           <p:nvPr/>
         </p:nvSpPr>
@@ -9487,7 +9611,7 @@
       </p:sp>
       <p:pic>
         <p:nvPicPr>
-          <p:cNvPr id="126" name="Picture 125" descr="render_ssd.png"/>
+          <p:cNvPr id="129" name="Picture 128" descr="render_ssd.png"/>
           <p:cNvPicPr>
             <a:picLocks noChangeAspect="1"/>
           </p:cNvPicPr>
@@ -9511,7 +9635,7 @@
       </p:pic>
       <p:pic>
         <p:nvPicPr>
-          <p:cNvPr id="127" name="Picture 126" descr="render_server.png"/>
+          <p:cNvPr id="130" name="Picture 129" descr="render_server.png"/>
           <p:cNvPicPr>
             <a:picLocks noChangeAspect="1"/>
           </p:cNvPicPr>
@@ -9535,7 +9659,7 @@
       </p:pic>
       <p:sp>
         <p:nvSpPr>
-          <p:cNvPr id="128" name="Rounded Rectangle 127"/>
+          <p:cNvPr id="131" name="Rounded Rectangle 130"/>
           <p:cNvSpPr/>
           <p:nvPr/>
         </p:nvSpPr>
@@ -9583,7 +9707,7 @@
       </p:sp>
       <p:sp>
         <p:nvSpPr>
-          <p:cNvPr id="129" name="Rounded Rectangle 128"/>
+          <p:cNvPr id="132" name="Rounded Rectangle 131"/>
           <p:cNvSpPr/>
           <p:nvPr/>
         </p:nvSpPr>
@@ -9631,7 +9755,7 @@
       </p:sp>
       <p:sp>
         <p:nvSpPr>
-          <p:cNvPr id="130" name="TextBox 129"/>
+          <p:cNvPr id="133" name="TextBox 132"/>
           <p:cNvSpPr txBox="1"/>
           <p:nvPr/>
         </p:nvSpPr>
@@ -9671,7 +9795,7 @@
       </p:sp>
       <p:sp>
         <p:nvSpPr>
-          <p:cNvPr id="131" name="Rounded Rectangle 130"/>
+          <p:cNvPr id="134" name="Rounded Rectangle 133"/>
           <p:cNvSpPr/>
           <p:nvPr/>
         </p:nvSpPr>
@@ -9717,7 +9841,7 @@
       </p:sp>
       <p:sp>
         <p:nvSpPr>
-          <p:cNvPr id="132" name="TextBox 131"/>
+          <p:cNvPr id="135" name="TextBox 134"/>
           <p:cNvSpPr txBox="1"/>
           <p:nvPr/>
         </p:nvSpPr>
@@ -9757,7 +9881,7 @@
       </p:sp>
       <p:pic>
         <p:nvPicPr>
-          <p:cNvPr id="133" name="Picture 132" descr="radar_blue.png"/>
+          <p:cNvPr id="136" name="Picture 135" descr="radar_blue.png"/>
           <p:cNvPicPr>
             <a:picLocks noChangeAspect="1"/>
           </p:cNvPicPr>
@@ -9781,7 +9905,7 @@
       </p:pic>
       <p:sp>
         <p:nvSpPr>
-          <p:cNvPr id="134" name="Left-Right Arrow 133"/>
+          <p:cNvPr id="137" name="Left-Right Arrow 136"/>
           <p:cNvSpPr/>
           <p:nvPr/>
         </p:nvSpPr>
@@ -9825,7 +9949,7 @@
       </p:sp>
       <p:sp>
         <p:nvSpPr>
-          <p:cNvPr id="135" name="TextBox 134"/>
+          <p:cNvPr id="138" name="TextBox 137"/>
           <p:cNvSpPr txBox="1"/>
           <p:nvPr/>
         </p:nvSpPr>
@@ -9865,7 +9989,7 @@
       </p:sp>
       <p:sp>
         <p:nvSpPr>
-          <p:cNvPr id="136" name="Rectangle 135"/>
+          <p:cNvPr id="139" name="Rectangle 138"/>
           <p:cNvSpPr/>
           <p:nvPr/>
         </p:nvSpPr>
@@ -9909,7 +10033,7 @@
       </p:sp>
       <p:sp>
         <p:nvSpPr>
-          <p:cNvPr id="137" name="TextBox 136"/>
+          <p:cNvPr id="140" name="TextBox 139"/>
           <p:cNvSpPr txBox="1"/>
           <p:nvPr/>
         </p:nvSpPr>
@@ -10017,7 +10141,7 @@
       </p:sp>
       <p:sp>
         <p:nvSpPr>
-          <p:cNvPr id="138" name="Rounded Rectangle 137"/>
+          <p:cNvPr id="141" name="Rounded Rectangle 140"/>
           <p:cNvSpPr/>
           <p:nvPr/>
         </p:nvSpPr>
@@ -10065,7 +10189,7 @@
       </p:sp>
       <p:sp>
         <p:nvSpPr>
-          <p:cNvPr id="139" name="Rectangle 138"/>
+          <p:cNvPr id="142" name="Rectangle 141"/>
           <p:cNvSpPr/>
           <p:nvPr/>
         </p:nvSpPr>
@@ -10111,7 +10235,7 @@
       </p:sp>
       <p:sp>
         <p:nvSpPr>
-          <p:cNvPr id="140" name="TextBox 139"/>
+          <p:cNvPr id="143" name="TextBox 142"/>
           <p:cNvSpPr txBox="1"/>
           <p:nvPr/>
         </p:nvSpPr>
@@ -10151,7 +10275,7 @@
       </p:sp>
       <p:pic>
         <p:nvPicPr>
-          <p:cNvPr id="141" name="Picture 140" descr="render_nand.png"/>
+          <p:cNvPr id="144" name="Picture 143" descr="render_nand.png"/>
           <p:cNvPicPr>
             <a:picLocks noChangeAspect="1"/>
           </p:cNvPicPr>
@@ -10175,7 +10299,7 @@
       </p:pic>
       <p:sp>
         <p:nvSpPr>
-          <p:cNvPr id="142" name="Rectangle 141"/>
+          <p:cNvPr id="145" name="Rectangle 144"/>
           <p:cNvSpPr/>
           <p:nvPr/>
         </p:nvSpPr>
@@ -10219,7 +10343,7 @@
       </p:sp>
       <p:sp>
         <p:nvSpPr>
-          <p:cNvPr id="143" name="TextBox 142"/>
+          <p:cNvPr id="146" name="TextBox 145"/>
           <p:cNvSpPr txBox="1"/>
           <p:nvPr/>
         </p:nvSpPr>
@@ -10259,7 +10383,7 @@
       </p:sp>
       <p:pic>
         <p:nvPicPr>
-          <p:cNvPr id="144" name="Picture 143" descr="render_ssd.png"/>
+          <p:cNvPr id="147" name="Picture 146" descr="render_ssd.png"/>
           <p:cNvPicPr>
             <a:picLocks noChangeAspect="1"/>
           </p:cNvPicPr>
@@ -10283,7 +10407,7 @@
       </p:pic>
       <p:sp>
         <p:nvSpPr>
-          <p:cNvPr id="145" name="Rectangle 144"/>
+          <p:cNvPr id="148" name="Rectangle 147"/>
           <p:cNvSpPr/>
           <p:nvPr/>
         </p:nvSpPr>
@@ -10327,7 +10451,7 @@
       </p:sp>
       <p:sp>
         <p:nvSpPr>
-          <p:cNvPr id="146" name="TextBox 145"/>
+          <p:cNvPr id="149" name="TextBox 148"/>
           <p:cNvSpPr txBox="1"/>
           <p:nvPr/>
         </p:nvSpPr>
@@ -10367,7 +10491,7 @@
       </p:sp>
       <p:pic>
         <p:nvPicPr>
-          <p:cNvPr id="147" name="Picture 146" descr="render_server.png"/>
+          <p:cNvPr id="150" name="Picture 149" descr="render_server.png"/>
           <p:cNvPicPr>
             <a:picLocks noChangeAspect="1"/>
           </p:cNvPicPr>
@@ -10391,7 +10515,7 @@
       </p:pic>
       <p:sp>
         <p:nvSpPr>
-          <p:cNvPr id="148" name="Rectangle 147"/>
+          <p:cNvPr id="151" name="Rectangle 150"/>
           <p:cNvSpPr/>
           <p:nvPr/>
         </p:nvSpPr>
@@ -10435,7 +10559,7 @@
       </p:sp>
       <p:sp>
         <p:nvSpPr>
-          <p:cNvPr id="149" name="TextBox 148"/>
+          <p:cNvPr id="152" name="TextBox 151"/>
           <p:cNvSpPr txBox="1"/>
           <p:nvPr/>
         </p:nvSpPr>
@@ -10543,7 +10667,7 @@
       </p:sp>
       <p:sp>
         <p:nvSpPr>
-          <p:cNvPr id="150" name="Rounded Rectangle 149"/>
+          <p:cNvPr id="153" name="Rounded Rectangle 152"/>
           <p:cNvSpPr/>
           <p:nvPr/>
         </p:nvSpPr>
@@ -10591,7 +10715,7 @@
       </p:sp>
       <p:sp>
         <p:nvSpPr>
-          <p:cNvPr id="151" name="Oval 150"/>
+          <p:cNvPr id="154" name="Oval 153"/>
           <p:cNvSpPr/>
           <p:nvPr/>
         </p:nvSpPr>
@@ -10635,7 +10759,7 @@
       </p:sp>
       <p:sp>
         <p:nvSpPr>
-          <p:cNvPr id="152" name="Round Same Side Corner Rectangle 151"/>
+          <p:cNvPr id="155" name="Round Same Side Corner Rectangle 154"/>
           <p:cNvSpPr/>
           <p:nvPr/>
         </p:nvSpPr>
@@ -10682,7 +10806,7 @@
       </p:sp>
       <p:sp>
         <p:nvSpPr>
-          <p:cNvPr id="153" name="Oval 152"/>
+          <p:cNvPr id="156" name="Oval 155"/>
           <p:cNvSpPr/>
           <p:nvPr/>
         </p:nvSpPr>
@@ -10726,7 +10850,7 @@
       </p:sp>
       <p:sp>
         <p:nvSpPr>
-          <p:cNvPr id="154" name="Round Same Side Corner Rectangle 153"/>
+          <p:cNvPr id="157" name="Round Same Side Corner Rectangle 156"/>
           <p:cNvSpPr/>
           <p:nvPr/>
         </p:nvSpPr>
@@ -10773,7 +10897,7 @@
       </p:sp>
       <p:pic>
         <p:nvPicPr>
-          <p:cNvPr id="155" name="Picture 154" descr="render_server.png"/>
+          <p:cNvPr id="158" name="Picture 157" descr="render_server.png"/>
           <p:cNvPicPr>
             <a:picLocks noChangeAspect="1"/>
           </p:cNvPicPr>
@@ -10797,7 +10921,7 @@
       </p:pic>
       <p:pic>
         <p:nvPicPr>
-          <p:cNvPr id="156" name="Picture 155" descr="refresh_blue.png"/>
+          <p:cNvPr id="159" name="Picture 158" descr="refresh_blue.png"/>
           <p:cNvPicPr>
             <a:picLocks noChangeAspect="1"/>
           </p:cNvPicPr>
@@ -10821,7 +10945,7 @@
       </p:pic>
       <p:sp>
         <p:nvSpPr>
-          <p:cNvPr id="157" name="TextBox 156"/>
+          <p:cNvPr id="160" name="TextBox 159"/>
           <p:cNvSpPr txBox="1"/>
           <p:nvPr/>
         </p:nvSpPr>
@@ -10861,7 +10985,7 @@
       </p:sp>
       <p:sp>
         <p:nvSpPr>
-          <p:cNvPr id="158" name="TextBox 157"/>
+          <p:cNvPr id="161" name="TextBox 160"/>
           <p:cNvSpPr txBox="1"/>
           <p:nvPr/>
         </p:nvSpPr>
@@ -10901,7 +11025,7 @@
       </p:sp>
       <p:sp>
         <p:nvSpPr>
-          <p:cNvPr id="159" name="Rectangle 158"/>
+          <p:cNvPr id="162" name="Rectangle 161"/>
           <p:cNvSpPr/>
           <p:nvPr/>
         </p:nvSpPr>
@@ -10945,7 +11069,7 @@
       </p:sp>
       <p:sp>
         <p:nvSpPr>
-          <p:cNvPr id="160" name="TextBox 159"/>
+          <p:cNvPr id="163" name="TextBox 162"/>
           <p:cNvSpPr txBox="1"/>
           <p:nvPr/>
         </p:nvSpPr>
@@ -11053,7 +11177,7 @@
       </p:sp>
       <p:sp>
         <p:nvSpPr>
-          <p:cNvPr id="161" name="Rectangle 160"/>
+          <p:cNvPr id="164" name="Rectangle 163"/>
           <p:cNvSpPr/>
           <p:nvPr/>
         </p:nvSpPr>
@@ -11097,7 +11221,7 @@
       </p:sp>
       <p:sp>
         <p:nvSpPr>
-          <p:cNvPr id="162" name="TextBox 161"/>
+          <p:cNvPr id="165" name="TextBox 164"/>
           <p:cNvSpPr txBox="1"/>
           <p:nvPr/>
         </p:nvSpPr>
@@ -11137,7 +11261,7 @@
       </p:sp>
       <p:sp>
         <p:nvSpPr>
-          <p:cNvPr id="163" name="TextBox 162"/>
+          <p:cNvPr id="166" name="TextBox 165"/>
           <p:cNvSpPr txBox="1"/>
           <p:nvPr/>
         </p:nvSpPr>
@@ -11177,7 +11301,7 @@
       </p:sp>
       <p:sp>
         <p:nvSpPr>
-          <p:cNvPr id="164" name="TextBox 163"/>
+          <p:cNvPr id="167" name="TextBox 166"/>
           <p:cNvSpPr txBox="1"/>
           <p:nvPr/>
         </p:nvSpPr>
@@ -11210,7 +11334,7 @@
                 <a:latin typeface="Arial"/>
                 <a:ea typeface="Arial"/>
               </a:rPr>
-              <a:t>3-C: C1 Convertibility · C2 Continuity · C3 Co-Creation. 전략 체계 개념도로 수치 주장은 담지 않음.</a:t>
+              <a:t>3-C: C1 Convertibility · C2 Continuity · C3 Co-Creation (전략 체계 개념도, 수치 주장 없음). 아이콘 Tabler Icons(MIT).</a:t>
             </a:r>
           </a:p>
           <a:p>
@@ -11227,14 +11351,14 @@
                 <a:latin typeface="Arial"/>
                 <a:ea typeface="Arial"/>
               </a:rPr>
-              <a:t>전략 1 사진: Samsung Semiconductor FMS 2026 전시(V10 Bonding V-NAND). 3D DRAM · SSD · 서버는 3D 렌더(개념), 아이콘 Tabler Icons(MIT).</a:t>
-            </a:r>
-          </a:p>
-        </p:txBody>
-      </p:sp>
-      <p:sp>
-        <p:nvSpPr>
-          <p:cNvPr id="165" name="TextBox 164"/>
+              <a:t>이미지: 전략 1 Cu/SiO2 하이브리드 본딩 단면 SEM(Hsu 외, Materials 2022, CC BY 4.0, 잘라 냄), 전략 2 삼성 FMS 2026 zHBM 전시, 전략 3 3D 렌더.</a:t>
+            </a:r>
+          </a:p>
+        </p:txBody>
+      </p:sp>
+      <p:sp>
+        <p:nvSpPr>
+          <p:cNvPr id="168" name="TextBox 167"/>
           <p:cNvSpPr txBox="1"/>
           <p:nvPr/>
         </p:nvSpPr>
@@ -13404,7 +13528,7 @@
       </p:sp>
       <p:pic>
         <p:nvPicPr>
-          <p:cNvPr id="50" name="Picture 49" descr="bonding.jpg"/>
+          <p:cNvPr id="50" name="Picture 49" descr="bonding_sem.jpg"/>
           <p:cNvPicPr>
             <a:picLocks noChangeAspect="1"/>
           </p:cNvPicPr>
@@ -13418,8 +13542,8 @@
         </p:blipFill>
         <p:spPr>
           <a:xfrm>
-            <a:off x="5202936" y="3814450"/>
-            <a:ext cx="1024128" cy="1076187"/>
+            <a:off x="5202936" y="4062419"/>
+            <a:ext cx="1024128" cy="580248"/>
           </a:xfrm>
           <a:prstGeom prst="rect">
             <a:avLst/>
@@ -13434,8 +13558,8 @@
         </p:nvSpPr>
         <p:spPr>
           <a:xfrm>
-            <a:off x="5202936" y="3814450"/>
-            <a:ext cx="1024128" cy="1076187"/>
+            <a:off x="5202936" y="4062419"/>
+            <a:ext cx="1024128" cy="580248"/>
           </a:xfrm>
           <a:prstGeom prst="rect">
             <a:avLst/>
@@ -14282,7 +14406,7 @@
       </p:sp>
       <p:pic>
         <p:nvPicPr>
-          <p:cNvPr id="69" name="Picture 68" descr="render_dram3d.png"/>
+          <p:cNvPr id="69" name="Picture 68" descr="zhbm.jpg"/>
           <p:cNvPicPr>
             <a:picLocks noChangeAspect="1"/>
           </p:cNvPicPr>
@@ -14296,8 +14420,8 @@
         </p:blipFill>
         <p:spPr>
           <a:xfrm>
-            <a:off x="5202936" y="5699909"/>
-            <a:ext cx="1024128" cy="743412"/>
+            <a:off x="5202936" y="5553977"/>
+            <a:ext cx="1024128" cy="1035277"/>
           </a:xfrm>
           <a:prstGeom prst="rect">
             <a:avLst/>
@@ -14306,7 +14430,51 @@
       </p:pic>
       <p:sp>
         <p:nvSpPr>
-          <p:cNvPr id="70" name="TextBox 69"/>
+          <p:cNvPr id="70" name="Rectangle 69"/>
+          <p:cNvSpPr/>
+          <p:nvPr/>
+        </p:nvSpPr>
+        <p:spPr>
+          <a:xfrm>
+            <a:off x="5202936" y="5553977"/>
+            <a:ext cx="1024128" cy="1035277"/>
+          </a:xfrm>
+          <a:prstGeom prst="rect">
+            <a:avLst/>
+          </a:prstGeom>
+          <a:noFill/>
+          <a:ln w="9525">
+            <a:solidFill>
+              <a:srgbClr val="D9D9D9"/>
+            </a:solidFill>
+          </a:ln>
+          <a:effectLst/>
+        </p:spPr>
+        <p:style>
+          <a:lnRef idx="1">
+            <a:schemeClr val="accent1"/>
+          </a:lnRef>
+          <a:fillRef idx="3">
+            <a:schemeClr val="accent1"/>
+          </a:fillRef>
+          <a:effectRef idx="2">
+            <a:schemeClr val="accent1"/>
+          </a:effectRef>
+          <a:fontRef idx="minor">
+            <a:schemeClr val="lt1"/>
+          </a:fontRef>
+        </p:style>
+        <p:txBody>
+          <a:bodyPr rtlCol="0" anchor="ctr"/>
+          <a:lstStyle/>
+          <a:p>
+            <a:pPr algn="ctr"/>
+          </a:p>
+        </p:txBody>
+      </p:sp>
+      <p:sp>
+        <p:nvSpPr>
+          <p:cNvPr id="71" name="TextBox 70"/>
           <p:cNvSpPr txBox="1"/>
           <p:nvPr/>
         </p:nvSpPr>
@@ -14397,7 +14565,7 @@
       </p:sp>
       <p:sp>
         <p:nvSpPr>
-          <p:cNvPr id="71" name="Rounded Rectangle 70"/>
+          <p:cNvPr id="72" name="Rounded Rectangle 71"/>
           <p:cNvSpPr/>
           <p:nvPr/>
         </p:nvSpPr>
@@ -14445,7 +14613,7 @@
       </p:sp>
       <p:sp>
         <p:nvSpPr>
-          <p:cNvPr id="72" name="Oval 71"/>
+          <p:cNvPr id="73" name="Oval 72"/>
           <p:cNvSpPr/>
           <p:nvPr/>
         </p:nvSpPr>
@@ -14489,7 +14657,7 @@
       </p:sp>
       <p:pic>
         <p:nvPicPr>
-          <p:cNvPr id="73" name="Picture 72" descr="cpu-2_blue.png"/>
+          <p:cNvPr id="74" name="Picture 73" descr="cpu-2_blue.png"/>
           <p:cNvPicPr>
             <a:picLocks noChangeAspect="1"/>
           </p:cNvPicPr>
@@ -14513,7 +14681,7 @@
       </p:pic>
       <p:sp>
         <p:nvSpPr>
-          <p:cNvPr id="74" name="TextBox 73"/>
+          <p:cNvPr id="75" name="TextBox 74"/>
           <p:cNvSpPr txBox="1"/>
           <p:nvPr/>
         </p:nvSpPr>
@@ -14570,7 +14738,7 @@
       </p:sp>
       <p:sp>
         <p:nvSpPr>
-          <p:cNvPr id="75" name="TextBox 74"/>
+          <p:cNvPr id="76" name="TextBox 75"/>
           <p:cNvSpPr txBox="1"/>
           <p:nvPr/>
         </p:nvSpPr>
@@ -14627,7 +14795,7 @@
       </p:sp>
       <p:sp>
         <p:nvSpPr>
-          <p:cNvPr id="76" name="Rounded Rectangle 75"/>
+          <p:cNvPr id="77" name="Rounded Rectangle 76"/>
           <p:cNvSpPr/>
           <p:nvPr/>
         </p:nvSpPr>
@@ -14675,7 +14843,7 @@
       </p:sp>
       <p:sp>
         <p:nvSpPr>
-          <p:cNvPr id="77" name="Oval 76"/>
+          <p:cNvPr id="78" name="Oval 77"/>
           <p:cNvSpPr/>
           <p:nvPr/>
         </p:nvSpPr>
@@ -14719,7 +14887,7 @@
       </p:sp>
       <p:pic>
         <p:nvPicPr>
-          <p:cNvPr id="78" name="Picture 77" descr="shield-check_blue.png"/>
+          <p:cNvPr id="79" name="Picture 78" descr="shield-check_blue.png"/>
           <p:cNvPicPr>
             <a:picLocks noChangeAspect="1"/>
           </p:cNvPicPr>
@@ -14743,7 +14911,7 @@
       </p:pic>
       <p:sp>
         <p:nvSpPr>
-          <p:cNvPr id="79" name="TextBox 78"/>
+          <p:cNvPr id="80" name="TextBox 79"/>
           <p:cNvSpPr txBox="1"/>
           <p:nvPr/>
         </p:nvSpPr>
@@ -14800,7 +14968,7 @@
       </p:sp>
       <p:sp>
         <p:nvSpPr>
-          <p:cNvPr id="80" name="TextBox 79"/>
+          <p:cNvPr id="81" name="TextBox 80"/>
           <p:cNvSpPr txBox="1"/>
           <p:nvPr/>
         </p:nvSpPr>
@@ -14857,7 +15025,7 @@
       </p:sp>
       <p:sp>
         <p:nvSpPr>
-          <p:cNvPr id="81" name="Rounded Rectangle 80"/>
+          <p:cNvPr id="82" name="Rounded Rectangle 81"/>
           <p:cNvSpPr/>
           <p:nvPr/>
         </p:nvSpPr>
@@ -14905,7 +15073,7 @@
       </p:sp>
       <p:sp>
         <p:nvSpPr>
-          <p:cNvPr id="82" name="Oval 81"/>
+          <p:cNvPr id="83" name="Oval 82"/>
           <p:cNvSpPr/>
           <p:nvPr/>
         </p:nvSpPr>
@@ -14949,7 +15117,7 @@
       </p:sp>
       <p:pic>
         <p:nvPicPr>
-          <p:cNvPr id="83" name="Picture 82" descr="puzzle_blue.png"/>
+          <p:cNvPr id="84" name="Picture 83" descr="puzzle_blue.png"/>
           <p:cNvPicPr>
             <a:picLocks noChangeAspect="1"/>
           </p:cNvPicPr>
@@ -14973,7 +15141,7 @@
       </p:pic>
       <p:sp>
         <p:nvSpPr>
-          <p:cNvPr id="84" name="TextBox 83"/>
+          <p:cNvPr id="85" name="TextBox 84"/>
           <p:cNvSpPr txBox="1"/>
           <p:nvPr/>
         </p:nvSpPr>
@@ -15030,7 +15198,7 @@
       </p:sp>
       <p:sp>
         <p:nvSpPr>
-          <p:cNvPr id="85" name="TextBox 84"/>
+          <p:cNvPr id="86" name="TextBox 85"/>
           <p:cNvSpPr txBox="1"/>
           <p:nvPr/>
         </p:nvSpPr>
@@ -15087,7 +15255,7 @@
       </p:sp>
       <p:sp>
         <p:nvSpPr>
-          <p:cNvPr id="86" name="Rounded Rectangle 85"/>
+          <p:cNvPr id="87" name="Rounded Rectangle 86"/>
           <p:cNvSpPr/>
           <p:nvPr/>
         </p:nvSpPr>
@@ -15133,7 +15301,7 @@
       </p:sp>
       <p:pic>
         <p:nvPicPr>
-          <p:cNvPr id="87" name="Picture 86" descr="render_ssd.png"/>
+          <p:cNvPr id="88" name="Picture 87" descr="render_ssd.png"/>
           <p:cNvPicPr>
             <a:picLocks noChangeAspect="1"/>
           </p:cNvPicPr>
@@ -15157,7 +15325,7 @@
       </p:pic>
       <p:pic>
         <p:nvPicPr>
-          <p:cNvPr id="88" name="Picture 87" descr="render_server.png"/>
+          <p:cNvPr id="89" name="Picture 88" descr="render_server.png"/>
           <p:cNvPicPr>
             <a:picLocks noChangeAspect="1"/>
           </p:cNvPicPr>
@@ -15181,7 +15349,7 @@
       </p:pic>
       <p:sp>
         <p:nvSpPr>
-          <p:cNvPr id="89" name="TextBox 88"/>
+          <p:cNvPr id="90" name="TextBox 89"/>
           <p:cNvSpPr txBox="1"/>
           <p:nvPr/>
         </p:nvSpPr>
@@ -15272,7 +15440,7 @@
       </p:sp>
       <p:sp>
         <p:nvSpPr>
-          <p:cNvPr id="90" name="Rounded Rectangle 89"/>
+          <p:cNvPr id="91" name="Rounded Rectangle 90"/>
           <p:cNvSpPr/>
           <p:nvPr/>
         </p:nvSpPr>
@@ -15320,7 +15488,7 @@
       </p:sp>
       <p:sp>
         <p:nvSpPr>
-          <p:cNvPr id="91" name="Oval 90"/>
+          <p:cNvPr id="92" name="Oval 91"/>
           <p:cNvSpPr/>
           <p:nvPr/>
         </p:nvSpPr>
@@ -15364,7 +15532,7 @@
       </p:sp>
       <p:pic>
         <p:nvPicPr>
-          <p:cNvPr id="92" name="Picture 91" descr="radar_blue.png"/>
+          <p:cNvPr id="93" name="Picture 92" descr="radar_blue.png"/>
           <p:cNvPicPr>
             <a:picLocks noChangeAspect="1"/>
           </p:cNvPicPr>
@@ -15388,7 +15556,7 @@
       </p:pic>
       <p:sp>
         <p:nvSpPr>
-          <p:cNvPr id="93" name="TextBox 92"/>
+          <p:cNvPr id="94" name="TextBox 93"/>
           <p:cNvSpPr txBox="1"/>
           <p:nvPr/>
         </p:nvSpPr>
@@ -15445,7 +15613,7 @@
       </p:sp>
       <p:sp>
         <p:nvSpPr>
-          <p:cNvPr id="94" name="TextBox 93"/>
+          <p:cNvPr id="95" name="TextBox 94"/>
           <p:cNvSpPr txBox="1"/>
           <p:nvPr/>
         </p:nvSpPr>
@@ -15502,7 +15670,7 @@
       </p:sp>
       <p:sp>
         <p:nvSpPr>
-          <p:cNvPr id="95" name="Rounded Rectangle 94"/>
+          <p:cNvPr id="96" name="Rounded Rectangle 95"/>
           <p:cNvSpPr/>
           <p:nvPr/>
         </p:nvSpPr>
@@ -15550,7 +15718,7 @@
       </p:sp>
       <p:sp>
         <p:nvSpPr>
-          <p:cNvPr id="96" name="Oval 95"/>
+          <p:cNvPr id="97" name="Oval 96"/>
           <p:cNvSpPr/>
           <p:nvPr/>
         </p:nvSpPr>
@@ -15594,7 +15762,7 @@
       </p:sp>
       <p:pic>
         <p:nvPicPr>
-          <p:cNvPr id="97" name="Picture 96" descr="sitemap_blue.png"/>
+          <p:cNvPr id="98" name="Picture 97" descr="sitemap_blue.png"/>
           <p:cNvPicPr>
             <a:picLocks noChangeAspect="1"/>
           </p:cNvPicPr>
@@ -15618,7 +15786,7 @@
       </p:pic>
       <p:sp>
         <p:nvSpPr>
-          <p:cNvPr id="98" name="TextBox 97"/>
+          <p:cNvPr id="99" name="TextBox 98"/>
           <p:cNvSpPr txBox="1"/>
           <p:nvPr/>
         </p:nvSpPr>
@@ -15675,7 +15843,7 @@
       </p:sp>
       <p:sp>
         <p:nvSpPr>
-          <p:cNvPr id="99" name="TextBox 98"/>
+          <p:cNvPr id="100" name="TextBox 99"/>
           <p:cNvSpPr txBox="1"/>
           <p:nvPr/>
         </p:nvSpPr>
@@ -15732,7 +15900,7 @@
       </p:sp>
       <p:sp>
         <p:nvSpPr>
-          <p:cNvPr id="100" name="Rounded Rectangle 99"/>
+          <p:cNvPr id="101" name="Rounded Rectangle 100"/>
           <p:cNvSpPr/>
           <p:nvPr/>
         </p:nvSpPr>
@@ -15780,7 +15948,7 @@
       </p:sp>
       <p:sp>
         <p:nvSpPr>
-          <p:cNvPr id="101" name="Oval 100"/>
+          <p:cNvPr id="102" name="Oval 101"/>
           <p:cNvSpPr/>
           <p:nvPr/>
         </p:nvSpPr>
@@ -15824,7 +15992,7 @@
       </p:sp>
       <p:pic>
         <p:nvPicPr>
-          <p:cNvPr id="102" name="Picture 101" descr="pencil-cog_blue.png"/>
+          <p:cNvPr id="103" name="Picture 102" descr="pencil-cog_blue.png"/>
           <p:cNvPicPr>
             <a:picLocks noChangeAspect="1"/>
           </p:cNvPicPr>
@@ -15848,7 +16016,7 @@
       </p:pic>
       <p:sp>
         <p:nvSpPr>
-          <p:cNvPr id="103" name="TextBox 102"/>
+          <p:cNvPr id="104" name="TextBox 103"/>
           <p:cNvSpPr txBox="1"/>
           <p:nvPr/>
         </p:nvSpPr>
@@ -15905,7 +16073,7 @@
       </p:sp>
       <p:sp>
         <p:nvSpPr>
-          <p:cNvPr id="104" name="TextBox 103"/>
+          <p:cNvPr id="105" name="TextBox 104"/>
           <p:cNvSpPr txBox="1"/>
           <p:nvPr/>
         </p:nvSpPr>
@@ -15962,7 +16130,7 @@
       </p:sp>
       <p:sp>
         <p:nvSpPr>
-          <p:cNvPr id="105" name="Rectangle 104"/>
+          <p:cNvPr id="106" name="Rectangle 105"/>
           <p:cNvSpPr/>
           <p:nvPr/>
         </p:nvSpPr>
@@ -16006,7 +16174,7 @@
       </p:sp>
       <p:sp>
         <p:nvSpPr>
-          <p:cNvPr id="106" name="TextBox 105"/>
+          <p:cNvPr id="107" name="TextBox 106"/>
           <p:cNvSpPr txBox="1"/>
           <p:nvPr/>
         </p:nvSpPr>
@@ -16046,7 +16214,7 @@
       </p:sp>
       <p:sp>
         <p:nvSpPr>
-          <p:cNvPr id="107" name="TextBox 106"/>
+          <p:cNvPr id="108" name="TextBox 107"/>
           <p:cNvSpPr txBox="1"/>
           <p:nvPr/>
         </p:nvSpPr>
@@ -16086,7 +16254,7 @@
       </p:sp>
       <p:sp>
         <p:nvSpPr>
-          <p:cNvPr id="108" name="TextBox 107"/>
+          <p:cNvPr id="109" name="TextBox 108"/>
           <p:cNvSpPr txBox="1"/>
           <p:nvPr/>
         </p:nvSpPr>
@@ -16119,7 +16287,7 @@
                 <a:latin typeface="Arial"/>
                 <a:ea typeface="Arial"/>
               </a:rPr>
-              <a:t>3-C: C1 Convertibility · C2 Continuity · C3 Co-Creation. 전략 체계 개념도로 수치 주장은 담지 않음.</a:t>
+              <a:t>3-C: C1 Convertibility · C2 Continuity · C3 Co-Creation (전략 체계 개념도, 수치 주장 없음). 아이콘 Tabler Icons(MIT).</a:t>
             </a:r>
           </a:p>
           <a:p>
@@ -16136,14 +16304,14 @@
                 <a:latin typeface="Arial"/>
                 <a:ea typeface="Arial"/>
               </a:rPr>
-              <a:t>전략 1 사진: Samsung Semiconductor FMS 2026 전시(V10 Bonding V-NAND). 3D DRAM · SSD · 서버는 3D 렌더(개념), 아이콘 Tabler Icons(MIT).</a:t>
-            </a:r>
-          </a:p>
-        </p:txBody>
-      </p:sp>
-      <p:sp>
-        <p:nvSpPr>
-          <p:cNvPr id="109" name="TextBox 108"/>
+              <a:t>이미지: 전략 1 Cu/SiO2 하이브리드 본딩 단면 SEM(Hsu 외, Materials 2022, CC BY 4.0, 잘라 냄), 전략 2 삼성 FMS 2026 zHBM 전시, 전략 3 3D 렌더.</a:t>
+            </a:r>
+          </a:p>
+        </p:txBody>
+      </p:sp>
+      <p:sp>
+        <p:nvSpPr>
+          <p:cNvPr id="110" name="TextBox 109"/>
           <p:cNvSpPr txBox="1"/>
           <p:nvPr/>
         </p:nvSpPr>
@@ -17458,7 +17626,7 @@
       </p:sp>
       <p:pic>
         <p:nvPicPr>
-          <p:cNvPr id="31" name="Picture 30" descr="bonding.jpg"/>
+          <p:cNvPr id="31" name="Picture 30" descr="bonding_sem.jpg"/>
           <p:cNvPicPr>
             <a:picLocks noChangeAspect="1"/>
           </p:cNvPicPr>
@@ -17472,8 +17640,8 @@
         </p:blipFill>
         <p:spPr>
           <a:xfrm>
-            <a:off x="832104" y="4091094"/>
-            <a:ext cx="932688" cy="980099"/>
+            <a:off x="832104" y="4316923"/>
+            <a:ext cx="932688" cy="528440"/>
           </a:xfrm>
           <a:prstGeom prst="rect">
             <a:avLst/>
@@ -17488,8 +17656,8 @@
         </p:nvSpPr>
         <p:spPr>
           <a:xfrm>
-            <a:off x="832104" y="4091094"/>
-            <a:ext cx="932688" cy="980099"/>
+            <a:off x="832104" y="4316923"/>
+            <a:ext cx="932688" cy="528440"/>
           </a:xfrm>
           <a:prstGeom prst="rect">
             <a:avLst/>
@@ -18216,7 +18384,7 @@
       </p:sp>
       <p:pic>
         <p:nvPicPr>
-          <p:cNvPr id="48" name="Picture 47" descr="render_dram3d.png"/>
+          <p:cNvPr id="48" name="Picture 47" descr="zhbm.jpg"/>
           <p:cNvPicPr>
             <a:picLocks noChangeAspect="1"/>
           </p:cNvPicPr>
@@ -18230,8 +18398,8 @@
         </p:blipFill>
         <p:spPr>
           <a:xfrm>
-            <a:off x="832104" y="5595937"/>
-            <a:ext cx="932688" cy="677036"/>
+            <a:off x="832104" y="5463035"/>
+            <a:ext cx="932688" cy="942841"/>
           </a:xfrm>
           <a:prstGeom prst="rect">
             <a:avLst/>
@@ -18240,7 +18408,51 @@
       </p:pic>
       <p:sp>
         <p:nvSpPr>
-          <p:cNvPr id="49" name="TextBox 48"/>
+          <p:cNvPr id="49" name="Rectangle 48"/>
+          <p:cNvSpPr/>
+          <p:nvPr/>
+        </p:nvSpPr>
+        <p:spPr>
+          <a:xfrm>
+            <a:off x="832104" y="5463035"/>
+            <a:ext cx="932688" cy="942841"/>
+          </a:xfrm>
+          <a:prstGeom prst="rect">
+            <a:avLst/>
+          </a:prstGeom>
+          <a:noFill/>
+          <a:ln w="9525">
+            <a:solidFill>
+              <a:srgbClr val="D9D9D9"/>
+            </a:solidFill>
+          </a:ln>
+          <a:effectLst/>
+        </p:spPr>
+        <p:style>
+          <a:lnRef idx="1">
+            <a:schemeClr val="accent1"/>
+          </a:lnRef>
+          <a:fillRef idx="3">
+            <a:schemeClr val="accent1"/>
+          </a:fillRef>
+          <a:effectRef idx="2">
+            <a:schemeClr val="accent1"/>
+          </a:effectRef>
+          <a:fontRef idx="minor">
+            <a:schemeClr val="lt1"/>
+          </a:fontRef>
+        </p:style>
+        <p:txBody>
+          <a:bodyPr rtlCol="0" anchor="ctr"/>
+          <a:lstStyle/>
+          <a:p>
+            <a:pPr algn="ctr"/>
+          </a:p>
+        </p:txBody>
+      </p:sp>
+      <p:sp>
+        <p:nvSpPr>
+          <p:cNvPr id="50" name="TextBox 49"/>
           <p:cNvSpPr txBox="1"/>
           <p:nvPr/>
         </p:nvSpPr>
@@ -18331,7 +18543,7 @@
       </p:sp>
       <p:sp>
         <p:nvSpPr>
-          <p:cNvPr id="50" name="Rounded Rectangle 49"/>
+          <p:cNvPr id="51" name="Rounded Rectangle 50"/>
           <p:cNvSpPr/>
           <p:nvPr/>
         </p:nvSpPr>
@@ -18379,7 +18591,7 @@
       </p:sp>
       <p:pic>
         <p:nvPicPr>
-          <p:cNvPr id="51" name="Picture 50" descr="cpu-2_blue.png"/>
+          <p:cNvPr id="52" name="Picture 51" descr="cpu-2_blue.png"/>
           <p:cNvPicPr>
             <a:picLocks noChangeAspect="1"/>
           </p:cNvPicPr>
@@ -18403,7 +18615,7 @@
       </p:pic>
       <p:sp>
         <p:nvSpPr>
-          <p:cNvPr id="52" name="TextBox 51"/>
+          <p:cNvPr id="53" name="TextBox 52"/>
           <p:cNvSpPr txBox="1"/>
           <p:nvPr/>
         </p:nvSpPr>
@@ -18443,7 +18655,7 @@
       </p:sp>
       <p:sp>
         <p:nvSpPr>
-          <p:cNvPr id="53" name="TextBox 52"/>
+          <p:cNvPr id="54" name="TextBox 53"/>
           <p:cNvSpPr txBox="1"/>
           <p:nvPr/>
         </p:nvSpPr>
@@ -18500,7 +18712,7 @@
       </p:sp>
       <p:sp>
         <p:nvSpPr>
-          <p:cNvPr id="54" name="Rounded Rectangle 53"/>
+          <p:cNvPr id="55" name="Rounded Rectangle 54"/>
           <p:cNvSpPr/>
           <p:nvPr/>
         </p:nvSpPr>
@@ -18548,7 +18760,7 @@
       </p:sp>
       <p:pic>
         <p:nvPicPr>
-          <p:cNvPr id="55" name="Picture 54" descr="shield-check_blue.png"/>
+          <p:cNvPr id="56" name="Picture 55" descr="shield-check_blue.png"/>
           <p:cNvPicPr>
             <a:picLocks noChangeAspect="1"/>
           </p:cNvPicPr>
@@ -18572,7 +18784,7 @@
       </p:pic>
       <p:sp>
         <p:nvSpPr>
-          <p:cNvPr id="56" name="TextBox 55"/>
+          <p:cNvPr id="57" name="TextBox 56"/>
           <p:cNvSpPr txBox="1"/>
           <p:nvPr/>
         </p:nvSpPr>
@@ -18612,7 +18824,7 @@
       </p:sp>
       <p:sp>
         <p:nvSpPr>
-          <p:cNvPr id="57" name="TextBox 56"/>
+          <p:cNvPr id="58" name="TextBox 57"/>
           <p:cNvSpPr txBox="1"/>
           <p:nvPr/>
         </p:nvSpPr>
@@ -18669,7 +18881,7 @@
       </p:sp>
       <p:sp>
         <p:nvSpPr>
-          <p:cNvPr id="58" name="Rounded Rectangle 57"/>
+          <p:cNvPr id="59" name="Rounded Rectangle 58"/>
           <p:cNvSpPr/>
           <p:nvPr/>
         </p:nvSpPr>
@@ -18717,7 +18929,7 @@
       </p:sp>
       <p:pic>
         <p:nvPicPr>
-          <p:cNvPr id="59" name="Picture 58" descr="puzzle_blue.png"/>
+          <p:cNvPr id="60" name="Picture 59" descr="puzzle_blue.png"/>
           <p:cNvPicPr>
             <a:picLocks noChangeAspect="1"/>
           </p:cNvPicPr>
@@ -18741,7 +18953,7 @@
       </p:pic>
       <p:sp>
         <p:nvSpPr>
-          <p:cNvPr id="60" name="TextBox 59"/>
+          <p:cNvPr id="61" name="TextBox 60"/>
           <p:cNvSpPr txBox="1"/>
           <p:nvPr/>
         </p:nvSpPr>
@@ -18781,7 +18993,7 @@
       </p:sp>
       <p:sp>
         <p:nvSpPr>
-          <p:cNvPr id="61" name="TextBox 60"/>
+          <p:cNvPr id="62" name="TextBox 61"/>
           <p:cNvSpPr txBox="1"/>
           <p:nvPr/>
         </p:nvSpPr>
@@ -18838,7 +19050,7 @@
       </p:sp>
       <p:sp>
         <p:nvSpPr>
-          <p:cNvPr id="62" name="Rectangle 61"/>
+          <p:cNvPr id="63" name="Rectangle 62"/>
           <p:cNvSpPr/>
           <p:nvPr/>
         </p:nvSpPr>
@@ -18882,7 +19094,7 @@
       </p:sp>
       <p:sp>
         <p:nvSpPr>
-          <p:cNvPr id="63" name="Rounded Rectangle 62"/>
+          <p:cNvPr id="64" name="Rounded Rectangle 63"/>
           <p:cNvSpPr/>
           <p:nvPr/>
         </p:nvSpPr>
@@ -18930,7 +19142,7 @@
       </p:sp>
       <p:pic>
         <p:nvPicPr>
-          <p:cNvPr id="64" name="Picture 63" descr="render_ssd.png"/>
+          <p:cNvPr id="65" name="Picture 64" descr="render_ssd.png"/>
           <p:cNvPicPr>
             <a:picLocks noChangeAspect="1"/>
           </p:cNvPicPr>
@@ -18954,7 +19166,7 @@
       </p:pic>
       <p:pic>
         <p:nvPicPr>
-          <p:cNvPr id="65" name="Picture 64" descr="render_server.png"/>
+          <p:cNvPr id="66" name="Picture 65" descr="render_server.png"/>
           <p:cNvPicPr>
             <a:picLocks noChangeAspect="1"/>
           </p:cNvPicPr>
@@ -18978,7 +19190,7 @@
       </p:pic>
       <p:sp>
         <p:nvSpPr>
-          <p:cNvPr id="66" name="TextBox 65"/>
+          <p:cNvPr id="67" name="TextBox 66"/>
           <p:cNvSpPr txBox="1"/>
           <p:nvPr/>
         </p:nvSpPr>
@@ -19069,7 +19281,7 @@
       </p:sp>
       <p:sp>
         <p:nvSpPr>
-          <p:cNvPr id="67" name="Rounded Rectangle 66"/>
+          <p:cNvPr id="68" name="Rounded Rectangle 67"/>
           <p:cNvSpPr/>
           <p:nvPr/>
         </p:nvSpPr>
@@ -19117,7 +19329,7 @@
       </p:sp>
       <p:pic>
         <p:nvPicPr>
-          <p:cNvPr id="68" name="Picture 67" descr="radar_blue.png"/>
+          <p:cNvPr id="69" name="Picture 68" descr="radar_blue.png"/>
           <p:cNvPicPr>
             <a:picLocks noChangeAspect="1"/>
           </p:cNvPicPr>
@@ -19141,7 +19353,7 @@
       </p:pic>
       <p:sp>
         <p:nvSpPr>
-          <p:cNvPr id="69" name="TextBox 68"/>
+          <p:cNvPr id="70" name="TextBox 69"/>
           <p:cNvSpPr txBox="1"/>
           <p:nvPr/>
         </p:nvSpPr>
@@ -19181,7 +19393,7 @@
       </p:sp>
       <p:sp>
         <p:nvSpPr>
-          <p:cNvPr id="70" name="TextBox 69"/>
+          <p:cNvPr id="71" name="TextBox 70"/>
           <p:cNvSpPr txBox="1"/>
           <p:nvPr/>
         </p:nvSpPr>
@@ -19238,7 +19450,7 @@
       </p:sp>
       <p:sp>
         <p:nvSpPr>
-          <p:cNvPr id="71" name="Rounded Rectangle 70"/>
+          <p:cNvPr id="72" name="Rounded Rectangle 71"/>
           <p:cNvSpPr/>
           <p:nvPr/>
         </p:nvSpPr>
@@ -19286,7 +19498,7 @@
       </p:sp>
       <p:pic>
         <p:nvPicPr>
-          <p:cNvPr id="72" name="Picture 71" descr="sitemap_blue.png"/>
+          <p:cNvPr id="73" name="Picture 72" descr="sitemap_blue.png"/>
           <p:cNvPicPr>
             <a:picLocks noChangeAspect="1"/>
           </p:cNvPicPr>
@@ -19310,7 +19522,7 @@
       </p:pic>
       <p:sp>
         <p:nvSpPr>
-          <p:cNvPr id="73" name="TextBox 72"/>
+          <p:cNvPr id="74" name="TextBox 73"/>
           <p:cNvSpPr txBox="1"/>
           <p:nvPr/>
         </p:nvSpPr>
@@ -19350,7 +19562,7 @@
       </p:sp>
       <p:sp>
         <p:nvSpPr>
-          <p:cNvPr id="74" name="TextBox 73"/>
+          <p:cNvPr id="75" name="TextBox 74"/>
           <p:cNvSpPr txBox="1"/>
           <p:nvPr/>
         </p:nvSpPr>
@@ -19407,7 +19619,7 @@
       </p:sp>
       <p:sp>
         <p:nvSpPr>
-          <p:cNvPr id="75" name="Rounded Rectangle 74"/>
+          <p:cNvPr id="76" name="Rounded Rectangle 75"/>
           <p:cNvSpPr/>
           <p:nvPr/>
         </p:nvSpPr>
@@ -19455,7 +19667,7 @@
       </p:sp>
       <p:pic>
         <p:nvPicPr>
-          <p:cNvPr id="76" name="Picture 75" descr="pencil-cog_blue.png"/>
+          <p:cNvPr id="77" name="Picture 76" descr="pencil-cog_blue.png"/>
           <p:cNvPicPr>
             <a:picLocks noChangeAspect="1"/>
           </p:cNvPicPr>
@@ -19479,7 +19691,7 @@
       </p:pic>
       <p:sp>
         <p:nvSpPr>
-          <p:cNvPr id="77" name="TextBox 76"/>
+          <p:cNvPr id="78" name="TextBox 77"/>
           <p:cNvSpPr txBox="1"/>
           <p:nvPr/>
         </p:nvSpPr>
@@ -19519,7 +19731,7 @@
       </p:sp>
       <p:sp>
         <p:nvSpPr>
-          <p:cNvPr id="78" name="TextBox 77"/>
+          <p:cNvPr id="79" name="TextBox 78"/>
           <p:cNvSpPr txBox="1"/>
           <p:nvPr/>
         </p:nvSpPr>
@@ -19576,7 +19788,7 @@
       </p:sp>
       <p:sp>
         <p:nvSpPr>
-          <p:cNvPr id="79" name="Rectangle 78"/>
+          <p:cNvPr id="80" name="Rectangle 79"/>
           <p:cNvSpPr/>
           <p:nvPr/>
         </p:nvSpPr>
@@ -19620,7 +19832,7 @@
       </p:sp>
       <p:sp>
         <p:nvSpPr>
-          <p:cNvPr id="80" name="Rectangle 79"/>
+          <p:cNvPr id="81" name="Rectangle 80"/>
           <p:cNvSpPr/>
           <p:nvPr/>
         </p:nvSpPr>
@@ -19666,7 +19878,7 @@
       </p:sp>
       <p:sp>
         <p:nvSpPr>
-          <p:cNvPr id="81" name="TextBox 80"/>
+          <p:cNvPr id="82" name="TextBox 81"/>
           <p:cNvSpPr txBox="1"/>
           <p:nvPr/>
         </p:nvSpPr>
@@ -19716,7 +19928,7 @@
       </p:sp>
       <p:sp>
         <p:nvSpPr>
-          <p:cNvPr id="82" name="Rectangle 81"/>
+          <p:cNvPr id="83" name="Rectangle 82"/>
           <p:cNvSpPr/>
           <p:nvPr/>
         </p:nvSpPr>
@@ -19760,7 +19972,7 @@
       </p:sp>
       <p:sp>
         <p:nvSpPr>
-          <p:cNvPr id="83" name="TextBox 82"/>
+          <p:cNvPr id="84" name="TextBox 83"/>
           <p:cNvSpPr txBox="1"/>
           <p:nvPr/>
         </p:nvSpPr>
@@ -19800,7 +20012,7 @@
       </p:sp>
       <p:sp>
         <p:nvSpPr>
-          <p:cNvPr id="84" name="TextBox 83"/>
+          <p:cNvPr id="85" name="TextBox 84"/>
           <p:cNvSpPr txBox="1"/>
           <p:nvPr/>
         </p:nvSpPr>
@@ -19840,7 +20052,7 @@
       </p:sp>
       <p:sp>
         <p:nvSpPr>
-          <p:cNvPr id="85" name="TextBox 84"/>
+          <p:cNvPr id="86" name="TextBox 85"/>
           <p:cNvSpPr txBox="1"/>
           <p:nvPr/>
         </p:nvSpPr>
@@ -19873,7 +20085,7 @@
                 <a:latin typeface="Arial"/>
                 <a:ea typeface="Arial"/>
               </a:rPr>
-              <a:t>3-C: C1 Convertibility · C2 Continuity · C3 Co-Creation. 전략 체계 개념도로 수치 주장은 담지 않음.</a:t>
+              <a:t>3-C: C1 Convertibility · C2 Continuity · C3 Co-Creation (전략 체계 개념도, 수치 주장 없음). 아이콘 Tabler Icons(MIT).</a:t>
             </a:r>
           </a:p>
           <a:p>
@@ -19890,14 +20102,14 @@
                 <a:latin typeface="Arial"/>
                 <a:ea typeface="Arial"/>
               </a:rPr>
-              <a:t>전략 1 사진: Samsung Semiconductor FMS 2026 전시(V10 Bonding V-NAND). 3D DRAM · SSD · 서버는 3D 렌더(개념), 아이콘 Tabler Icons(MIT).</a:t>
-            </a:r>
-          </a:p>
-        </p:txBody>
-      </p:sp>
-      <p:sp>
-        <p:nvSpPr>
-          <p:cNvPr id="86" name="TextBox 85"/>
+              <a:t>이미지: 전략 1 Cu/SiO2 하이브리드 본딩 단면 SEM(Hsu 외, Materials 2022, CC BY 4.0, 잘라 냄), 전략 2 삼성 FMS 2026 zHBM 전시, 전략 3 3D 렌더.</a:t>
+            </a:r>
+          </a:p>
+        </p:txBody>
+      </p:sp>
+      <p:sp>
+        <p:nvSpPr>
+          <p:cNvPr id="87" name="TextBox 86"/>
           <p:cNvSpPr txBox="1"/>
           <p:nvPr/>
         </p:nvSpPr>
